--- a/AgenticUI/MM1.pptx
+++ b/AgenticUI/MM1.pptx
@@ -4,14 +4,14 @@
   <p:sldMasterIdLst>
     <p:sldMasterId id="2147483648" r:id="rId1"/>
   </p:sldMasterIdLst>
+  <p:notesMasterIdLst>
+    <p:notesMasterId r:id="rId5"/>
+  </p:notesMasterIdLst>
   <p:sldIdLst>
     <p:sldId id="256" r:id="rId2"/>
     <p:sldId id="257" r:id="rId3"/>
     <p:sldId id="258" r:id="rId4"/>
   </p:sldIdLst>
-  <p:notesMasterIdLst>
-    <p:notesMasterId r:id="rId5"/>
-  </p:notesMasterIdLst>
   <p:sldSz cx="12192000" cy="6858000"/>
   <p:notesSz cx="6858000" cy="12192000"/>
   <p:defaultTextStyle>
@@ -106,6 +106,11 @@
       </a:defRPr>
     </a:lvl9pPr>
   </p:defaultTextStyle>
+  <p:extLst>
+    <p:ext uri="{EFAFB233-063F-42B5-8137-9DF3F51BA10A}">
+      <p15:sldGuideLst xmlns:p15="http://schemas.microsoft.com/office/powerpoint/2012/main"/>
+    </p:ext>
+  </p:extLst>
 </p:presentation>
 </file>
 
@@ -131,234 +136,10 @@
           <a:chExt cx="0" cy="0"/>
         </a:xfrm>
       </p:grpSpPr>
-      <p:sp>
-        <p:nvSpPr>
-          <p:cNvPr id="2" name="Header Placeholder 1"/>
-          <p:cNvSpPr>
-            <a:spLocks noGrp="1"/>
-          </p:cNvSpPr>
-          <p:nvPr>
-            <p:ph type="hdr" sz="quarter"/>
-          </p:nvPr>
-        </p:nvSpPr>
-        <p:spPr>
-          <a:xfrm>
-            <a:off x="0" y="0"/>
-            <a:ext cx="2971800" cy="458788"/>
-          </a:xfrm>
-          <a:prstGeom prst="rect">
-            <a:avLst/>
-          </a:prstGeom>
-        </p:spPr>
-        <p:txBody>
-          <a:bodyPr vert="horz" lIns="91440" tIns="45720" rIns="91440" bIns="45720" rtlCol="0"/>
-          <a:lstStyle>
-            <a:lvl1pPr algn="l">
-              <a:defRPr sz="1200"/>
-            </a:lvl1pPr>
-          </a:lstStyle>
-          <a:p>
-            <a:endParaRPr lang="en-US"/>
-          </a:p>
-        </p:txBody>
-      </p:sp>
-      <p:sp>
-        <p:nvSpPr>
-          <p:cNvPr id="3" name="Date Placeholder 2"/>
-          <p:cNvSpPr>
-            <a:spLocks noGrp="1"/>
-          </p:cNvSpPr>
-          <p:nvPr>
-            <p:ph type="dt" idx="1"/>
-          </p:nvPr>
-        </p:nvSpPr>
-        <p:spPr>
-          <a:xfrm>
-            <a:off x="3884613" y="0"/>
-            <a:ext cx="2971800" cy="458788"/>
-          </a:xfrm>
-          <a:prstGeom prst="rect">
-            <a:avLst/>
-          </a:prstGeom>
-        </p:spPr>
-        <p:txBody>
-          <a:bodyPr vert="horz" lIns="91440" tIns="45720" rIns="91440" bIns="45720" rtlCol="0"/>
-          <a:lstStyle>
-            <a:lvl1pPr algn="r">
-              <a:defRPr sz="1200"/>
-            </a:lvl1pPr>
-          </a:lstStyle>
-          <a:p>
-            <a:fld id="{5282F153-3F37-0F45-9E97-73ACFA13230C}" type="datetimeFigureOut">
-              <a:rPr lang="en-US"/>
-              <a:t>7/23/19</a:t>
-            </a:fld>
-            <a:endParaRPr lang="en-US"/>
-          </a:p>
-        </p:txBody>
-      </p:sp>
-      <p:sp>
-        <p:nvSpPr>
-          <p:cNvPr id="4" name="Slide Image Placeholder 3"/>
-          <p:cNvSpPr>
-            <a:spLocks noGrp="1" noRot="1" noChangeAspect="1"/>
-          </p:cNvSpPr>
-          <p:nvPr>
-            <p:ph type="sldImg" idx="2"/>
-          </p:nvPr>
-        </p:nvSpPr>
-        <p:spPr>
-          <a:xfrm>
-            <a:off x="685800" y="1143000"/>
-            <a:ext cx="5486400" cy="3086100"/>
-          </a:xfrm>
-          <a:prstGeom prst="rect">
-            <a:avLst/>
-          </a:prstGeom>
-          <a:noFill/>
-          <a:ln w="12700">
-            <a:solidFill>
-              <a:prstClr val="black"/>
-            </a:solidFill>
-          </a:ln>
-        </p:spPr>
-        <p:txBody>
-          <a:bodyPr vert="horz" lIns="91440" tIns="45720" rIns="91440" bIns="45720" rtlCol="0" anchor="ctr"/>
-          <a:lstStyle/>
-          <a:p>
-            <a:endParaRPr lang="en-US"/>
-          </a:p>
-        </p:txBody>
-      </p:sp>
-      <p:sp>
-        <p:nvSpPr>
-          <p:cNvPr id="5" name="Notes Placeholder 4"/>
-          <p:cNvSpPr>
-            <a:spLocks noGrp="1"/>
-          </p:cNvSpPr>
-          <p:nvPr>
-            <p:ph type="body" sz="quarter" idx="3"/>
-          </p:nvPr>
-        </p:nvSpPr>
-        <p:spPr>
-          <a:xfrm>
-            <a:off x="685800" y="4400550"/>
-            <a:ext cx="5486400" cy="3600450"/>
-          </a:xfrm>
-          <a:prstGeom prst="rect">
-            <a:avLst/>
-          </a:prstGeom>
-        </p:spPr>
-        <p:txBody>
-          <a:bodyPr vert="horz" lIns="91440" tIns="45720" rIns="91440" bIns="45720" rtlCol="0"/>
-          <a:lstStyle/>
-          <a:p>
-            <a:pPr lvl="0"/>
-            <a:r>
-              <a:rPr lang="en-US"/>
-              <a:t>Click to edit Master text styles</a:t>
-            </a:r>
-          </a:p>
-          <a:p>
-            <a:pPr lvl="1"/>
-            <a:r>
-              <a:rPr lang="en-US"/>
-              <a:t>Second level</a:t>
-            </a:r>
-          </a:p>
-          <a:p>
-            <a:pPr lvl="2"/>
-            <a:r>
-              <a:rPr lang="en-US"/>
-              <a:t>Third level</a:t>
-            </a:r>
-          </a:p>
-          <a:p>
-            <a:pPr lvl="3"/>
-            <a:r>
-              <a:rPr lang="en-US"/>
-              <a:t>Fourth level</a:t>
-            </a:r>
-          </a:p>
-          <a:p>
-            <a:pPr lvl="4"/>
-            <a:r>
-              <a:rPr lang="en-US"/>
-              <a:t>Fifth level</a:t>
-            </a:r>
-          </a:p>
-        </p:txBody>
-      </p:sp>
-      <p:sp>
-        <p:nvSpPr>
-          <p:cNvPr id="6" name="Footer Placeholder 5"/>
-          <p:cNvSpPr>
-            <a:spLocks noGrp="1"/>
-          </p:cNvSpPr>
-          <p:nvPr>
-            <p:ph type="ftr" sz="quarter" idx="4"/>
-          </p:nvPr>
-        </p:nvSpPr>
-        <p:spPr>
-          <a:xfrm>
-            <a:off x="0" y="8685213"/>
-            <a:ext cx="2971800" cy="458787"/>
-          </a:xfrm>
-          <a:prstGeom prst="rect">
-            <a:avLst/>
-          </a:prstGeom>
-        </p:spPr>
-        <p:txBody>
-          <a:bodyPr vert="horz" lIns="91440" tIns="45720" rIns="91440" bIns="45720" rtlCol="0" anchor="b"/>
-          <a:lstStyle>
-            <a:lvl1pPr algn="l">
-              <a:defRPr sz="1200"/>
-            </a:lvl1pPr>
-          </a:lstStyle>
-          <a:p>
-            <a:endParaRPr lang="en-US"/>
-          </a:p>
-        </p:txBody>
-      </p:sp>
-      <p:sp>
-        <p:nvSpPr>
-          <p:cNvPr id="7" name="Slide Number Placeholder 6"/>
-          <p:cNvSpPr>
-            <a:spLocks noGrp="1"/>
-          </p:cNvSpPr>
-          <p:nvPr>
-            <p:ph type="sldNum" sz="quarter" idx="5"/>
-          </p:nvPr>
-        </p:nvSpPr>
-        <p:spPr>
-          <a:xfrm>
-            <a:off x="3884613" y="8685213"/>
-            <a:ext cx="2971800" cy="458787"/>
-          </a:xfrm>
-          <a:prstGeom prst="rect">
-            <a:avLst/>
-          </a:prstGeom>
-        </p:spPr>
-        <p:txBody>
-          <a:bodyPr vert="horz" lIns="91440" tIns="45720" rIns="91440" bIns="45720" rtlCol="0" anchor="b"/>
-          <a:lstStyle>
-            <a:lvl1pPr algn="r">
-              <a:defRPr sz="1200"/>
-            </a:lvl1pPr>
-          </a:lstStyle>
-          <a:p>
-            <a:fld id="{CE5E9CC1-C706-0F49-92D6-E571CC5EEA8F}" type="slidenum">
-              <a:rPr lang="en-US"/>
-              <a:t>‹#›</a:t>
-            </a:fld>
-            <a:endParaRPr lang="en-US"/>
-          </a:p>
-        </p:txBody>
-      </p:sp>
     </p:spTree>
     <p:extLst>
       <p:ext uri="{BB962C8B-B14F-4D97-AF65-F5344CB8AC3E}">
-        <p14:creationId xmlns:p14="http://schemas.microsoft.com/office/powerpoint/2010/main" val="1024086991"/>
+        <p14:creationId xmlns:p14="http://schemas.microsoft.com/office/powerpoint/2010/main" val="1925259596"/>
       </p:ext>
     </p:extLst>
   </p:cSld>
@@ -502,10 +283,6 @@
           <a:bodyPr/>
           <a:lstStyle/>
           <a:p>
-            <a:r>
-              <a:rPr lang="en-US" dirty="0"/>
-              <a:t/>
-            </a:r>
             <a:endParaRPr lang="en-US" dirty="0"/>
           </a:p>
         </p:txBody>
@@ -590,10 +367,6 @@
           <a:bodyPr/>
           <a:lstStyle/>
           <a:p>
-            <a:r>
-              <a:rPr lang="en-US" dirty="0"/>
-              <a:t/>
-            </a:r>
             <a:endParaRPr lang="en-US" dirty="0"/>
           </a:p>
         </p:txBody>
@@ -678,10 +451,6 @@
           <a:bodyPr/>
           <a:lstStyle/>
           <a:p>
-            <a:r>
-              <a:rPr lang="en-US" dirty="0"/>
-              <a:t/>
-            </a:r>
             <a:endParaRPr lang="en-US" dirty="0"/>
           </a:p>
         </p:txBody>
@@ -760,6 +529,7 @@
         <a:solidFill>
           <a:srgbClr val="050D19"/>
         </a:solidFill>
+        <a:effectLst/>
       </p:bgPr>
     </p:bg>
     <p:spTree>
@@ -796,7 +566,7 @@
           </a:prstGeom>
           <a:extLst>
             <a:ext uri="{C572A759-6A51-4108-AA02-DFA0A04FC94B}">
-              <ma14:wrappingTextBoxFlag xmlns:ma14="http://schemas.microsoft.com/office/mac/drawingml/2011/main" val="0"/>
+              <ma14:wrappingTextBoxFlag xmlns:ma14="http://schemas.microsoft.com/office/mac/drawingml/2011/main" xmlns="" val="0"/>
             </a:ext>
           </a:extLst>
         </p:spPr>
@@ -817,8 +587,8 @@
           <a:p>
             <a:pPr algn="l"/>
             <a:fld id="{F7021451-1387-4CA6-816F-3879F97B5CBC}" type="slidenum">
-              <a:rPr b="0" lang="en-US"/>
-              <a:t>1002</a:t>
+              <a:rPr lang="en-US" b="0"/>
+              <a:t>‹#›</a:t>
             </a:fld>
             <a:endParaRPr lang="en-US"/>
           </a:p>
@@ -835,6 +605,11 @@
 <file path=ppt/slideMasters/slideMaster1.xml><?xml version="1.0" encoding="utf-8"?>
 <p:sldMaster xmlns:a="http://schemas.openxmlformats.org/drawingml/2006/main" xmlns:r="http://schemas.openxmlformats.org/officeDocument/2006/relationships" xmlns:p="http://schemas.openxmlformats.org/presentationml/2006/main">
   <p:cSld>
+    <p:bg>
+      <p:bgRef idx="1001">
+        <a:schemeClr val="bg1"/>
+      </p:bgRef>
+    </p:bg>
     <p:spTree>
       <p:nvGrpSpPr>
         <p:cNvPr id="1" name=""/>
@@ -869,7 +644,7 @@
           </a:prstGeom>
           <a:extLst>
             <a:ext uri="{C572A759-6A51-4108-AA02-DFA0A04FC94B}">
-              <ma14:wrappingTextBoxFlag xmlns:ma14="http://schemas.microsoft.com/office/mac/drawingml/2011/main" val="0"/>
+              <ma14:wrappingTextBoxFlag xmlns:ma14="http://schemas.microsoft.com/office/mac/drawingml/2011/main" xmlns="" val="0"/>
             </a:ext>
           </a:extLst>
         </p:spPr>
@@ -890,8 +665,8 @@
           <a:p>
             <a:pPr algn="l"/>
             <a:fld id="{F7021451-1387-4CA6-816F-3879F97B5CBC}" type="slidenum">
-              <a:rPr b="0" lang="en-US"/>
-              <a:t>null</a:t>
+              <a:rPr lang="en-US" b="0"/>
+              <a:t>‹#›</a:t>
             </a:fld>
             <a:endParaRPr lang="en-US"/>
           </a:p>
@@ -1177,15 +952,15 @@
       </p:grpSpPr>
       <p:pic>
         <p:nvPicPr>
-          <p:cNvPr id="2" name="Image 0" descr="/mnt/data/macro_ultra_modern_work/assets/bg1_dark.png">    </p:cNvPr>
+          <p:cNvPr id="2" name="Image 0" descr="/mnt/data/macro_ultra_modern_work/assets/bg1_dark.png"/>
           <p:cNvPicPr>
             <a:picLocks noChangeAspect="1"/>
           </p:cNvPicPr>
           <p:nvPr/>
         </p:nvPicPr>
         <p:blipFill>
-          <a:blip r:embed="rId1"/>
-          <a:srcRect l="418" r="418" t="0" b="0"/>
+          <a:blip r:embed="rId3"/>
+          <a:srcRect l="418" r="418"/>
           <a:stretch/>
         </p:blipFill>
         <p:spPr>
@@ -1224,6 +999,13 @@
             <a:prstDash val="solid"/>
           </a:ln>
         </p:spPr>
+        <p:txBody>
+          <a:bodyPr/>
+          <a:lstStyle/>
+          <a:p>
+            <a:endParaRPr lang="en-US"/>
+          </a:p>
+        </p:txBody>
       </p:sp>
       <p:sp>
         <p:nvSpPr>
@@ -1251,6 +1033,13 @@
             <a:prstDash val="solid"/>
           </a:ln>
         </p:spPr>
+        <p:txBody>
+          <a:bodyPr/>
+          <a:lstStyle/>
+          <a:p>
+            <a:endParaRPr lang="en-US"/>
+          </a:p>
+        </p:txBody>
       </p:sp>
       <p:sp>
         <p:nvSpPr>
@@ -1278,6 +1067,13 @@
             <a:prstDash val="solid"/>
           </a:ln>
         </p:spPr>
+        <p:txBody>
+          <a:bodyPr/>
+          <a:lstStyle/>
+          <a:p>
+            <a:endParaRPr lang="en-US"/>
+          </a:p>
+        </p:txBody>
       </p:sp>
       <p:sp>
         <p:nvSpPr>
@@ -1305,6 +1101,13 @@
             <a:prstDash val="solid"/>
           </a:ln>
         </p:spPr>
+        <p:txBody>
+          <a:bodyPr/>
+          <a:lstStyle/>
+          <a:p>
+            <a:endParaRPr lang="en-US"/>
+          </a:p>
+        </p:txBody>
       </p:sp>
       <p:sp>
         <p:nvSpPr>
@@ -1332,6 +1135,13 @@
             <a:prstDash val="solid"/>
           </a:ln>
         </p:spPr>
+        <p:txBody>
+          <a:bodyPr/>
+          <a:lstStyle/>
+          <a:p>
+            <a:endParaRPr lang="en-US"/>
+          </a:p>
+        </p:txBody>
       </p:sp>
       <p:sp>
         <p:nvSpPr>
@@ -1361,6 +1171,13 @@
             <a:prstDash val="solid"/>
           </a:ln>
         </p:spPr>
+        <p:txBody>
+          <a:bodyPr/>
+          <a:lstStyle/>
+          <a:p>
+            <a:endParaRPr lang="en-US"/>
+          </a:p>
+        </p:txBody>
       </p:sp>
       <p:sp>
         <p:nvSpPr>
@@ -1383,7 +1200,7 @@
           <a:bodyPr wrap="square" lIns="0" tIns="0" rIns="0" bIns="0" rtlCol="0" anchor="ctr"/>
           <a:lstStyle/>
           <a:p>
-            <a:pPr indent="0" marL="0">
+            <a:pPr marL="0" indent="0">
               <a:buNone/>
             </a:pPr>
             <a:r>
@@ -1422,7 +1239,7 @@
           <a:bodyPr wrap="square" lIns="0" tIns="0" rIns="0" bIns="0" rtlCol="0" anchor="ctr"/>
           <a:lstStyle/>
           <a:p>
-            <a:pPr indent="0" marL="0">
+            <a:pPr marL="0" indent="0">
               <a:buNone/>
             </a:pPr>
             <a:r>
@@ -1439,7 +1256,7 @@
             <a:endParaRPr lang="en-US" sz="2450" dirty="0"/>
           </a:p>
           <a:p>
-            <a:pPr indent="0" marL="0">
+            <a:pPr marL="0" indent="0">
               <a:buNone/>
             </a:pPr>
             <a:r>
@@ -1478,7 +1295,7 @@
           <a:bodyPr wrap="square" lIns="0" tIns="0" rIns="0" bIns="0" rtlCol="0" anchor="ctr"/>
           <a:lstStyle/>
           <a:p>
-            <a:pPr indent="0" marL="0">
+            <a:pPr marL="0" indent="0">
               <a:buNone/>
             </a:pPr>
             <a:r>
@@ -1517,7 +1334,7 @@
           <a:bodyPr wrap="square" lIns="0" tIns="0" rIns="0" bIns="0" rtlCol="0" anchor="t"/>
           <a:lstStyle/>
           <a:p>
-            <a:pPr indent="0" marL="0">
+            <a:pPr marL="0" indent="0">
               <a:buNone/>
             </a:pPr>
             <a:r>
@@ -1565,6 +1382,13 @@
             <a:prstDash val="solid"/>
           </a:ln>
         </p:spPr>
+        <p:txBody>
+          <a:bodyPr/>
+          <a:lstStyle/>
+          <a:p>
+            <a:endParaRPr lang="en-US"/>
+          </a:p>
+        </p:txBody>
       </p:sp>
       <p:sp>
         <p:nvSpPr>
@@ -1594,6 +1418,13 @@
             <a:prstDash val="solid"/>
           </a:ln>
         </p:spPr>
+        <p:txBody>
+          <a:bodyPr/>
+          <a:lstStyle/>
+          <a:p>
+            <a:endParaRPr lang="en-US"/>
+          </a:p>
+        </p:txBody>
       </p:sp>
       <p:sp>
         <p:nvSpPr>
@@ -1616,7 +1447,7 @@
           <a:bodyPr wrap="square" lIns="0" tIns="0" rIns="0" bIns="0" rtlCol="0" anchor="ctr"/>
           <a:lstStyle/>
           <a:p>
-            <a:pPr indent="0" marL="0">
+            <a:pPr marL="0" indent="0">
               <a:buNone/>
             </a:pPr>
             <a:r>
@@ -1655,7 +1486,7 @@
           <a:bodyPr wrap="square" lIns="0" tIns="0" rIns="0" bIns="0" rtlCol="0" anchor="ctr"/>
           <a:lstStyle/>
           <a:p>
-            <a:pPr indent="0" marL="0">
+            <a:pPr marL="0" indent="0">
               <a:buNone/>
             </a:pPr>
             <a:r>
@@ -1703,6 +1534,13 @@
             <a:prstDash val="solid"/>
           </a:ln>
         </p:spPr>
+        <p:txBody>
+          <a:bodyPr/>
+          <a:lstStyle/>
+          <a:p>
+            <a:endParaRPr lang="en-US"/>
+          </a:p>
+        </p:txBody>
       </p:sp>
       <p:sp>
         <p:nvSpPr>
@@ -1732,6 +1570,13 @@
             <a:prstDash val="solid"/>
           </a:ln>
         </p:spPr>
+        <p:txBody>
+          <a:bodyPr/>
+          <a:lstStyle/>
+          <a:p>
+            <a:endParaRPr lang="en-US"/>
+          </a:p>
+        </p:txBody>
       </p:sp>
       <p:sp>
         <p:nvSpPr>
@@ -1754,7 +1599,7 @@
           <a:bodyPr wrap="square" lIns="0" tIns="0" rIns="0" bIns="0" rtlCol="0" anchor="ctr"/>
           <a:lstStyle/>
           <a:p>
-            <a:pPr indent="0" marL="0">
+            <a:pPr marL="0" indent="0">
               <a:buNone/>
             </a:pPr>
             <a:r>
@@ -1793,7 +1638,7 @@
           <a:bodyPr wrap="square" lIns="0" tIns="0" rIns="0" bIns="0" rtlCol="0" anchor="ctr"/>
           <a:lstStyle/>
           <a:p>
-            <a:pPr indent="0" marL="0">
+            <a:pPr marL="0" indent="0">
               <a:buNone/>
             </a:pPr>
             <a:r>
@@ -1841,6 +1686,13 @@
             <a:prstDash val="solid"/>
           </a:ln>
         </p:spPr>
+        <p:txBody>
+          <a:bodyPr/>
+          <a:lstStyle/>
+          <a:p>
+            <a:endParaRPr lang="en-US"/>
+          </a:p>
+        </p:txBody>
       </p:sp>
       <p:sp>
         <p:nvSpPr>
@@ -1870,6 +1722,13 @@
             <a:prstDash val="solid"/>
           </a:ln>
         </p:spPr>
+        <p:txBody>
+          <a:bodyPr/>
+          <a:lstStyle/>
+          <a:p>
+            <a:endParaRPr lang="en-US"/>
+          </a:p>
+        </p:txBody>
       </p:sp>
       <p:sp>
         <p:nvSpPr>
@@ -1892,7 +1751,7 @@
           <a:bodyPr wrap="square" lIns="0" tIns="0" rIns="0" bIns="0" rtlCol="0" anchor="ctr"/>
           <a:lstStyle/>
           <a:p>
-            <a:pPr indent="0" marL="0">
+            <a:pPr marL="0" indent="0">
               <a:buNone/>
             </a:pPr>
             <a:r>
@@ -1931,7 +1790,7 @@
           <a:bodyPr wrap="square" lIns="0" tIns="0" rIns="0" bIns="0" rtlCol="0" anchor="ctr"/>
           <a:lstStyle/>
           <a:p>
-            <a:pPr indent="0" marL="0">
+            <a:pPr marL="0" indent="0">
               <a:buNone/>
             </a:pPr>
             <a:r>
@@ -1979,6 +1838,13 @@
             <a:prstDash val="solid"/>
           </a:ln>
         </p:spPr>
+        <p:txBody>
+          <a:bodyPr/>
+          <a:lstStyle/>
+          <a:p>
+            <a:endParaRPr lang="en-US"/>
+          </a:p>
+        </p:txBody>
       </p:sp>
       <p:sp>
         <p:nvSpPr>
@@ -2008,6 +1874,13 @@
             <a:prstDash val="solid"/>
           </a:ln>
         </p:spPr>
+        <p:txBody>
+          <a:bodyPr/>
+          <a:lstStyle/>
+          <a:p>
+            <a:endParaRPr lang="en-US"/>
+          </a:p>
+        </p:txBody>
       </p:sp>
       <p:sp>
         <p:nvSpPr>
@@ -2030,7 +1903,7 @@
           <a:bodyPr wrap="square" lIns="0" tIns="0" rIns="0" bIns="0" rtlCol="0" anchor="ctr"/>
           <a:lstStyle/>
           <a:p>
-            <a:pPr algn="ctr" indent="0" marL="0">
+            <a:pPr marL="0" indent="0" algn="ctr">
               <a:buNone/>
             </a:pPr>
             <a:r>
@@ -2076,6 +1949,13 @@
             <a:prstDash val="solid"/>
           </a:ln>
         </p:spPr>
+        <p:txBody>
+          <a:bodyPr/>
+          <a:lstStyle/>
+          <a:p>
+            <a:endParaRPr lang="en-US"/>
+          </a:p>
+        </p:txBody>
       </p:sp>
       <p:sp>
         <p:nvSpPr>
@@ -2098,7 +1978,7 @@
           <a:bodyPr wrap="square" lIns="0" tIns="0" rIns="0" bIns="0" rtlCol="0" anchor="ctr"/>
           <a:lstStyle/>
           <a:p>
-            <a:pPr algn="ctr" indent="0" marL="0">
+            <a:pPr marL="0" indent="0" algn="ctr">
               <a:buNone/>
             </a:pPr>
             <a:r>
@@ -2144,6 +2024,13 @@
             <a:prstDash val="solid"/>
           </a:ln>
         </p:spPr>
+        <p:txBody>
+          <a:bodyPr/>
+          <a:lstStyle/>
+          <a:p>
+            <a:endParaRPr lang="en-US"/>
+          </a:p>
+        </p:txBody>
       </p:sp>
       <p:sp>
         <p:nvSpPr>
@@ -2166,7 +2053,7 @@
           <a:bodyPr wrap="square" lIns="0" tIns="0" rIns="0" bIns="0" rtlCol="0" anchor="ctr"/>
           <a:lstStyle/>
           <a:p>
-            <a:pPr algn="ctr" indent="0" marL="0">
+            <a:pPr marL="0" indent="0" algn="ctr">
               <a:buNone/>
             </a:pPr>
             <a:r>
@@ -2208,6 +2095,13 @@
             <a:prstDash val="solid"/>
           </a:ln>
         </p:spPr>
+        <p:txBody>
+          <a:bodyPr/>
+          <a:lstStyle/>
+          <a:p>
+            <a:endParaRPr lang="en-US"/>
+          </a:p>
+        </p:txBody>
       </p:sp>
       <p:sp>
         <p:nvSpPr>
@@ -2233,6 +2127,13 @@
             <a:prstDash val="solid"/>
           </a:ln>
         </p:spPr>
+        <p:txBody>
+          <a:bodyPr/>
+          <a:lstStyle/>
+          <a:p>
+            <a:endParaRPr lang="en-US"/>
+          </a:p>
+        </p:txBody>
       </p:sp>
       <p:sp>
         <p:nvSpPr>
@@ -2264,13 +2165,20 @@
             <a:prstDash val="solid"/>
           </a:ln>
           <a:effectLst>
-            <a:outerShdw sx="100000" sy="100000" kx="0" ky="0" algn="bl" rotWithShape="0" blurRad="25400" dist="19050" dir="2700000">
+            <a:outerShdw blurRad="25400" dist="19050" dir="2700000" algn="bl" rotWithShape="0">
               <a:srgbClr val="000000">
                 <a:alpha val="32000"/>
               </a:srgbClr>
             </a:outerShdw>
           </a:effectLst>
         </p:spPr>
+        <p:txBody>
+          <a:bodyPr/>
+          <a:lstStyle/>
+          <a:p>
+            <a:endParaRPr lang="en-US"/>
+          </a:p>
+        </p:txBody>
       </p:sp>
       <p:sp>
         <p:nvSpPr>
@@ -2298,6 +2206,13 @@
             <a:prstDash val="solid"/>
           </a:ln>
         </p:spPr>
+        <p:txBody>
+          <a:bodyPr/>
+          <a:lstStyle/>
+          <a:p>
+            <a:endParaRPr lang="en-US"/>
+          </a:p>
+        </p:txBody>
       </p:sp>
       <p:sp>
         <p:nvSpPr>
@@ -2320,7 +2235,7 @@
           <a:bodyPr wrap="square" lIns="0" tIns="0" rIns="0" bIns="0" rtlCol="0" anchor="ctr"/>
           <a:lstStyle/>
           <a:p>
-            <a:pPr indent="0" marL="0">
+            <a:pPr marL="0" indent="0">
               <a:buNone/>
             </a:pPr>
             <a:r>
@@ -2359,7 +2274,7 @@
           <a:bodyPr wrap="square" lIns="0" tIns="0" rIns="0" bIns="0" rtlCol="0" anchor="ctr"/>
           <a:lstStyle/>
           <a:p>
-            <a:pPr indent="0" marL="0">
+            <a:pPr marL="0" indent="0">
               <a:buNone/>
             </a:pPr>
             <a:r>
@@ -2407,13 +2322,20 @@
             <a:prstDash val="solid"/>
           </a:ln>
           <a:effectLst>
-            <a:outerShdw sx="100000" sy="100000" kx="0" ky="0" algn="bl" rotWithShape="0" blurRad="322580000" dist="241935000" dir="162000000000">
+            <a:outerShdw blurRad="322580000" dist="241935000" algn="bl" rotWithShape="0">
               <a:srgbClr val="000000">
-                <a:alpha val="3200000000"/>
+                <a:alpha val="0"/>
               </a:srgbClr>
             </a:outerShdw>
           </a:effectLst>
         </p:spPr>
+        <p:txBody>
+          <a:bodyPr/>
+          <a:lstStyle/>
+          <a:p>
+            <a:endParaRPr lang="en-US"/>
+          </a:p>
+        </p:txBody>
       </p:sp>
       <p:sp>
         <p:nvSpPr>
@@ -2441,6 +2363,13 @@
             <a:prstDash val="solid"/>
           </a:ln>
         </p:spPr>
+        <p:txBody>
+          <a:bodyPr/>
+          <a:lstStyle/>
+          <a:p>
+            <a:endParaRPr lang="en-US"/>
+          </a:p>
+        </p:txBody>
       </p:sp>
       <p:sp>
         <p:nvSpPr>
@@ -2463,7 +2392,7 @@
           <a:bodyPr wrap="square" lIns="0" tIns="0" rIns="0" bIns="0" rtlCol="0" anchor="ctr"/>
           <a:lstStyle/>
           <a:p>
-            <a:pPr indent="0" marL="0">
+            <a:pPr marL="0" indent="0">
               <a:buNone/>
             </a:pPr>
             <a:r>
@@ -2502,7 +2431,7 @@
           <a:bodyPr wrap="square" lIns="0" tIns="0" rIns="0" bIns="0" rtlCol="0" anchor="ctr"/>
           <a:lstStyle/>
           <a:p>
-            <a:pPr indent="0" marL="0">
+            <a:pPr marL="0" indent="0">
               <a:buNone/>
             </a:pPr>
             <a:r>
@@ -2550,13 +2479,20 @@
             <a:prstDash val="solid"/>
           </a:ln>
           <a:effectLst>
-            <a:outerShdw sx="100000" sy="100000" kx="0" ky="0" algn="bl" rotWithShape="0" blurRad="4096766000000" dist="3072574500000" dir="9720000000000000">
+            <a:outerShdw algn="bl" rotWithShape="0">
               <a:srgbClr val="000000">
-                <a:alpha val="320000000000000"/>
+                <a:alpha val="0"/>
               </a:srgbClr>
             </a:outerShdw>
           </a:effectLst>
         </p:spPr>
+        <p:txBody>
+          <a:bodyPr/>
+          <a:lstStyle/>
+          <a:p>
+            <a:endParaRPr lang="en-US"/>
+          </a:p>
+        </p:txBody>
       </p:sp>
       <p:sp>
         <p:nvSpPr>
@@ -2584,6 +2520,13 @@
             <a:prstDash val="solid"/>
           </a:ln>
         </p:spPr>
+        <p:txBody>
+          <a:bodyPr/>
+          <a:lstStyle/>
+          <a:p>
+            <a:endParaRPr lang="en-US"/>
+          </a:p>
+        </p:txBody>
       </p:sp>
       <p:sp>
         <p:nvSpPr>
@@ -2606,7 +2549,7 @@
           <a:bodyPr wrap="square" lIns="0" tIns="0" rIns="0" bIns="0" rtlCol="0" anchor="ctr"/>
           <a:lstStyle/>
           <a:p>
-            <a:pPr indent="0" marL="0">
+            <a:pPr marL="0" indent="0">
               <a:buNone/>
             </a:pPr>
             <a:r>
@@ -2645,7 +2588,7 @@
           <a:bodyPr wrap="square" lIns="0" tIns="0" rIns="0" bIns="0" rtlCol="0" anchor="ctr"/>
           <a:lstStyle/>
           <a:p>
-            <a:pPr indent="0" marL="0">
+            <a:pPr marL="0" indent="0">
               <a:buNone/>
             </a:pPr>
             <a:r>
@@ -2691,6 +2634,13 @@
             <a:prstDash val="solid"/>
           </a:ln>
         </p:spPr>
+        <p:txBody>
+          <a:bodyPr/>
+          <a:lstStyle/>
+          <a:p>
+            <a:endParaRPr lang="en-US"/>
+          </a:p>
+        </p:txBody>
       </p:sp>
       <p:sp>
         <p:nvSpPr>
@@ -2713,7 +2663,7 @@
           <a:bodyPr wrap="square" lIns="0" tIns="0" rIns="0" bIns="0" rtlCol="0" anchor="ctr"/>
           <a:lstStyle/>
           <a:p>
-            <a:pPr algn="ctr" indent="0" marL="0">
+            <a:pPr marL="0" indent="0" algn="ctr">
               <a:buNone/>
             </a:pPr>
             <a:r>
@@ -2759,6 +2709,13 @@
             <a:prstDash val="solid"/>
           </a:ln>
         </p:spPr>
+        <p:txBody>
+          <a:bodyPr/>
+          <a:lstStyle/>
+          <a:p>
+            <a:endParaRPr lang="en-US"/>
+          </a:p>
+        </p:txBody>
       </p:sp>
       <p:sp>
         <p:nvSpPr>
@@ -2781,7 +2738,7 @@
           <a:bodyPr wrap="square" lIns="0" tIns="0" rIns="0" bIns="0" rtlCol="0" anchor="ctr"/>
           <a:lstStyle/>
           <a:p>
-            <a:pPr algn="ctr" indent="0" marL="0">
+            <a:pPr marL="0" indent="0" algn="ctr">
               <a:buNone/>
             </a:pPr>
             <a:r>
@@ -2827,6 +2784,13 @@
             <a:prstDash val="solid"/>
           </a:ln>
         </p:spPr>
+        <p:txBody>
+          <a:bodyPr/>
+          <a:lstStyle/>
+          <a:p>
+            <a:endParaRPr lang="en-US"/>
+          </a:p>
+        </p:txBody>
       </p:sp>
       <p:sp>
         <p:nvSpPr>
@@ -2849,7 +2813,7 @@
           <a:bodyPr wrap="square" lIns="0" tIns="0" rIns="0" bIns="0" rtlCol="0" anchor="ctr"/>
           <a:lstStyle/>
           <a:p>
-            <a:pPr algn="ctr" indent="0" marL="0">
+            <a:pPr marL="0" indent="0" algn="ctr">
               <a:buNone/>
             </a:pPr>
             <a:r>
@@ -2895,6 +2859,13 @@
             <a:prstDash val="solid"/>
           </a:ln>
         </p:spPr>
+        <p:txBody>
+          <a:bodyPr/>
+          <a:lstStyle/>
+          <a:p>
+            <a:endParaRPr lang="en-US"/>
+          </a:p>
+        </p:txBody>
       </p:sp>
       <p:sp>
         <p:nvSpPr>
@@ -2917,7 +2888,7 @@
           <a:bodyPr wrap="square" lIns="0" tIns="0" rIns="0" bIns="0" rtlCol="0" anchor="ctr"/>
           <a:lstStyle/>
           <a:p>
-            <a:pPr algn="ctr" indent="0" marL="0">
+            <a:pPr marL="0" indent="0" algn="ctr">
               <a:buNone/>
             </a:pPr>
             <a:r>
@@ -2963,6 +2934,13 @@
             <a:prstDash val="solid"/>
           </a:ln>
         </p:spPr>
+        <p:txBody>
+          <a:bodyPr/>
+          <a:lstStyle/>
+          <a:p>
+            <a:endParaRPr lang="en-US"/>
+          </a:p>
+        </p:txBody>
       </p:sp>
       <p:sp>
         <p:nvSpPr>
@@ -2985,7 +2963,7 @@
           <a:bodyPr wrap="square" lIns="0" tIns="0" rIns="0" bIns="0" rtlCol="0" anchor="ctr"/>
           <a:lstStyle/>
           <a:p>
-            <a:pPr algn="ctr" indent="0" marL="0">
+            <a:pPr marL="0" indent="0" algn="ctr">
               <a:buNone/>
             </a:pPr>
             <a:r>
@@ -3031,6 +3009,13 @@
             <a:prstDash val="solid"/>
           </a:ln>
         </p:spPr>
+        <p:txBody>
+          <a:bodyPr/>
+          <a:lstStyle/>
+          <a:p>
+            <a:endParaRPr lang="en-US"/>
+          </a:p>
+        </p:txBody>
       </p:sp>
       <p:sp>
         <p:nvSpPr>
@@ -3053,7 +3038,7 @@
           <a:bodyPr wrap="square" lIns="0" tIns="0" rIns="0" bIns="0" rtlCol="0" anchor="ctr"/>
           <a:lstStyle/>
           <a:p>
-            <a:pPr algn="ctr" indent="0" marL="0">
+            <a:pPr marL="0" indent="0" algn="ctr">
               <a:buNone/>
             </a:pPr>
             <a:r>
@@ -3092,7 +3077,7 @@
           <a:bodyPr wrap="square" lIns="0" tIns="0" rIns="0" bIns="0" rtlCol="0" anchor="ctr"/>
           <a:lstStyle/>
           <a:p>
-            <a:pPr indent="0" marL="0">
+            <a:pPr marL="0" indent="0">
               <a:buNone/>
             </a:pPr>
             <a:r>
@@ -3112,7 +3097,7 @@
       </p:sp>
       <p:sp>
         <p:nvSpPr>
-          <p:cNvPr id="25" name="Slide Number Placeholder 0"/>
+          <p:cNvPr id="59" name="Slide Number Placeholder 0"/>
           <p:cNvSpPr>
             <a:spLocks noGrp="1"/>
           </p:cNvSpPr>
@@ -3130,7 +3115,7 @@
           </a:prstGeom>
           <a:extLst>
             <a:ext uri="{C572A759-6A51-4108-AA02-DFA0A04FC94B}">
-              <ma14:wrappingTextBoxFlag xmlns:ma14="http://schemas.microsoft.com/office/mac/drawingml/2011/main" val="0"/>
+              <ma14:wrappingTextBoxFlag xmlns:ma14="http://schemas.microsoft.com/office/mac/drawingml/2011/main" xmlns="" val="0"/>
             </a:ext>
           </a:extLst>
         </p:spPr>
@@ -3151,7 +3136,7 @@
           <a:p>
             <a:pPr algn="l"/>
             <a:fld id="{F7021451-1387-4CA6-816F-3879F97B5CBC}" type="slidenum">
-              <a:rPr b="0" lang="en-US"/>
+              <a:rPr lang="en-US" b="0"/>
               <a:t>1</a:t>
             </a:fld>
             <a:endParaRPr lang="en-US"/>
@@ -3185,15 +3170,15 @@
       </p:grpSpPr>
       <p:pic>
         <p:nvPicPr>
-          <p:cNvPr id="2" name="Image 0" descr="/mnt/data/macro_ultra_modern_work/assets/bg2_dark.png">    </p:cNvPr>
+          <p:cNvPr id="2" name="Image 0" descr="/mnt/data/macro_ultra_modern_work/assets/bg2_dark.png"/>
           <p:cNvPicPr>
             <a:picLocks noChangeAspect="1"/>
           </p:cNvPicPr>
           <p:nvPr/>
         </p:nvPicPr>
         <p:blipFill>
-          <a:blip r:embed="rId1"/>
-          <a:srcRect l="48" r="48" t="0" b="0"/>
+          <a:blip r:embed="rId3"/>
+          <a:srcRect l="48" r="48"/>
           <a:stretch/>
         </p:blipFill>
         <p:spPr>
@@ -3232,6 +3217,13 @@
             <a:prstDash val="solid"/>
           </a:ln>
         </p:spPr>
+        <p:txBody>
+          <a:bodyPr/>
+          <a:lstStyle/>
+          <a:p>
+            <a:endParaRPr lang="en-US"/>
+          </a:p>
+        </p:txBody>
       </p:sp>
       <p:sp>
         <p:nvSpPr>
@@ -3259,6 +3251,13 @@
             <a:prstDash val="solid"/>
           </a:ln>
         </p:spPr>
+        <p:txBody>
+          <a:bodyPr/>
+          <a:lstStyle/>
+          <a:p>
+            <a:endParaRPr lang="en-US"/>
+          </a:p>
+        </p:txBody>
       </p:sp>
       <p:sp>
         <p:nvSpPr>
@@ -3286,6 +3285,13 @@
             <a:prstDash val="solid"/>
           </a:ln>
         </p:spPr>
+        <p:txBody>
+          <a:bodyPr/>
+          <a:lstStyle/>
+          <a:p>
+            <a:endParaRPr lang="en-US"/>
+          </a:p>
+        </p:txBody>
       </p:sp>
       <p:sp>
         <p:nvSpPr>
@@ -3313,6 +3319,13 @@
             <a:prstDash val="solid"/>
           </a:ln>
         </p:spPr>
+        <p:txBody>
+          <a:bodyPr/>
+          <a:lstStyle/>
+          <a:p>
+            <a:endParaRPr lang="en-US"/>
+          </a:p>
+        </p:txBody>
       </p:sp>
       <p:sp>
         <p:nvSpPr>
@@ -3340,6 +3353,13 @@
             <a:prstDash val="solid"/>
           </a:ln>
         </p:spPr>
+        <p:txBody>
+          <a:bodyPr/>
+          <a:lstStyle/>
+          <a:p>
+            <a:endParaRPr lang="en-US"/>
+          </a:p>
+        </p:txBody>
       </p:sp>
       <p:sp>
         <p:nvSpPr>
@@ -3362,7 +3382,7 @@
           <a:bodyPr wrap="square" lIns="0" tIns="0" rIns="0" bIns="0" rtlCol="0" anchor="ctr"/>
           <a:lstStyle/>
           <a:p>
-            <a:pPr indent="0" marL="0">
+            <a:pPr marL="0" indent="0">
               <a:buNone/>
             </a:pPr>
             <a:r>
@@ -3401,7 +3421,7 @@
           <a:bodyPr wrap="square" lIns="0" tIns="0" rIns="0" bIns="0" rtlCol="0" anchor="ctr"/>
           <a:lstStyle/>
           <a:p>
-            <a:pPr indent="0" marL="0">
+            <a:pPr marL="0" indent="0">
               <a:buNone/>
             </a:pPr>
             <a:r>
@@ -3440,7 +3460,7 @@
           <a:bodyPr wrap="square" lIns="0" tIns="0" rIns="0" bIns="0" rtlCol="0" anchor="ctr"/>
           <a:lstStyle/>
           <a:p>
-            <a:pPr indent="0" marL="0">
+            <a:pPr marL="0" indent="0">
               <a:buNone/>
             </a:pPr>
             <a:r>
@@ -3482,6 +3502,13 @@
             <a:prstDash val="solid"/>
           </a:ln>
         </p:spPr>
+        <p:txBody>
+          <a:bodyPr/>
+          <a:lstStyle/>
+          <a:p>
+            <a:endParaRPr lang="en-US"/>
+          </a:p>
+        </p:txBody>
       </p:sp>
       <p:sp>
         <p:nvSpPr>
@@ -3507,6 +3534,13 @@
             <a:prstDash val="solid"/>
           </a:ln>
         </p:spPr>
+        <p:txBody>
+          <a:bodyPr/>
+          <a:lstStyle/>
+          <a:p>
+            <a:endParaRPr lang="en-US"/>
+          </a:p>
+        </p:txBody>
       </p:sp>
       <p:sp>
         <p:nvSpPr>
@@ -3532,6 +3566,13 @@
             <a:prstDash val="solid"/>
           </a:ln>
         </p:spPr>
+        <p:txBody>
+          <a:bodyPr/>
+          <a:lstStyle/>
+          <a:p>
+            <a:endParaRPr lang="en-US"/>
+          </a:p>
+        </p:txBody>
       </p:sp>
       <p:sp>
         <p:nvSpPr>
@@ -3557,6 +3598,13 @@
             <a:prstDash val="solid"/>
           </a:ln>
         </p:spPr>
+        <p:txBody>
+          <a:bodyPr/>
+          <a:lstStyle/>
+          <a:p>
+            <a:endParaRPr lang="en-US"/>
+          </a:p>
+        </p:txBody>
       </p:sp>
       <p:sp>
         <p:nvSpPr>
@@ -3582,6 +3630,13 @@
             <a:prstDash val="solid"/>
           </a:ln>
         </p:spPr>
+        <p:txBody>
+          <a:bodyPr/>
+          <a:lstStyle/>
+          <a:p>
+            <a:endParaRPr lang="en-US"/>
+          </a:p>
+        </p:txBody>
       </p:sp>
       <p:sp>
         <p:nvSpPr>
@@ -3611,6 +3666,13 @@
             <a:prstDash val="solid"/>
           </a:ln>
         </p:spPr>
+        <p:txBody>
+          <a:bodyPr/>
+          <a:lstStyle/>
+          <a:p>
+            <a:endParaRPr lang="en-US"/>
+          </a:p>
+        </p:txBody>
       </p:sp>
       <p:sp>
         <p:nvSpPr>
@@ -3633,7 +3695,7 @@
           <a:bodyPr wrap="square" lIns="0" tIns="0" rIns="0" bIns="0" rtlCol="0" anchor="ctr"/>
           <a:lstStyle/>
           <a:p>
-            <a:pPr algn="ctr" indent="0" marL="0">
+            <a:pPr marL="0" indent="0" algn="ctr">
               <a:buNone/>
             </a:pPr>
             <a:r>
@@ -3679,6 +3741,13 @@
             <a:prstDash val="solid"/>
           </a:ln>
         </p:spPr>
+        <p:txBody>
+          <a:bodyPr/>
+          <a:lstStyle/>
+          <a:p>
+            <a:endParaRPr lang="en-US"/>
+          </a:p>
+        </p:txBody>
       </p:sp>
       <p:sp>
         <p:nvSpPr>
@@ -3701,7 +3770,7 @@
           <a:bodyPr wrap="square" lIns="0" tIns="0" rIns="0" bIns="0" rtlCol="0" anchor="ctr"/>
           <a:lstStyle/>
           <a:p>
-            <a:pPr algn="ctr" indent="0" marL="0">
+            <a:pPr marL="0" indent="0" algn="ctr">
               <a:buNone/>
             </a:pPr>
             <a:r>
@@ -3747,6 +3816,13 @@
             <a:prstDash val="solid"/>
           </a:ln>
         </p:spPr>
+        <p:txBody>
+          <a:bodyPr/>
+          <a:lstStyle/>
+          <a:p>
+            <a:endParaRPr lang="en-US"/>
+          </a:p>
+        </p:txBody>
       </p:sp>
       <p:sp>
         <p:nvSpPr>
@@ -3769,7 +3845,7 @@
           <a:bodyPr wrap="square" lIns="0" tIns="0" rIns="0" bIns="0" rtlCol="0" anchor="ctr"/>
           <a:lstStyle/>
           <a:p>
-            <a:pPr algn="ctr" indent="0" marL="0">
+            <a:pPr marL="0" indent="0" algn="ctr">
               <a:buNone/>
             </a:pPr>
             <a:r>
@@ -3815,6 +3891,13 @@
             <a:prstDash val="solid"/>
           </a:ln>
         </p:spPr>
+        <p:txBody>
+          <a:bodyPr/>
+          <a:lstStyle/>
+          <a:p>
+            <a:endParaRPr lang="en-US"/>
+          </a:p>
+        </p:txBody>
       </p:sp>
       <p:sp>
         <p:nvSpPr>
@@ -3837,7 +3920,7 @@
           <a:bodyPr wrap="square" lIns="0" tIns="0" rIns="0" bIns="0" rtlCol="0" anchor="ctr"/>
           <a:lstStyle/>
           <a:p>
-            <a:pPr algn="ctr" indent="0" marL="0">
+            <a:pPr marL="0" indent="0" algn="ctr">
               <a:buNone/>
             </a:pPr>
             <a:r>
@@ -3883,6 +3966,13 @@
             <a:prstDash val="solid"/>
           </a:ln>
         </p:spPr>
+        <p:txBody>
+          <a:bodyPr/>
+          <a:lstStyle/>
+          <a:p>
+            <a:endParaRPr lang="en-US"/>
+          </a:p>
+        </p:txBody>
       </p:sp>
       <p:sp>
         <p:nvSpPr>
@@ -3905,7 +3995,7 @@
           <a:bodyPr wrap="square" lIns="0" tIns="0" rIns="0" bIns="0" rtlCol="0" anchor="ctr"/>
           <a:lstStyle/>
           <a:p>
-            <a:pPr algn="ctr" indent="0" marL="0">
+            <a:pPr marL="0" indent="0" algn="ctr">
               <a:buNone/>
             </a:pPr>
             <a:r>
@@ -3951,6 +4041,13 @@
             <a:prstDash val="solid"/>
           </a:ln>
         </p:spPr>
+        <p:txBody>
+          <a:bodyPr/>
+          <a:lstStyle/>
+          <a:p>
+            <a:endParaRPr lang="en-US"/>
+          </a:p>
+        </p:txBody>
       </p:sp>
       <p:sp>
         <p:nvSpPr>
@@ -3973,7 +4070,7 @@
           <a:bodyPr wrap="square" lIns="0" tIns="0" rIns="0" bIns="0" rtlCol="0" anchor="ctr"/>
           <a:lstStyle/>
           <a:p>
-            <a:pPr algn="ctr" indent="0" marL="0">
+            <a:pPr marL="0" indent="0" algn="ctr">
               <a:buNone/>
             </a:pPr>
             <a:r>
@@ -4021,13 +4118,20 @@
             <a:prstDash val="solid"/>
           </a:ln>
           <a:effectLst>
-            <a:outerShdw sx="100000" sy="100000" kx="0" ky="0" algn="bl" rotWithShape="0" blurRad="52028928200000000" dist="39021696150000000" dir="583200000000000000000">
+            <a:outerShdw algn="bl" rotWithShape="0">
               <a:srgbClr val="000000">
-                <a:alpha val="32000000000000000000"/>
+                <a:alpha val="0"/>
               </a:srgbClr>
             </a:outerShdw>
           </a:effectLst>
         </p:spPr>
+        <p:txBody>
+          <a:bodyPr/>
+          <a:lstStyle/>
+          <a:p>
+            <a:endParaRPr lang="en-US"/>
+          </a:p>
+        </p:txBody>
       </p:sp>
       <p:sp>
         <p:nvSpPr>
@@ -4055,6 +4159,13 @@
             <a:prstDash val="solid"/>
           </a:ln>
         </p:spPr>
+        <p:txBody>
+          <a:bodyPr/>
+          <a:lstStyle/>
+          <a:p>
+            <a:endParaRPr lang="en-US"/>
+          </a:p>
+        </p:txBody>
       </p:sp>
       <p:sp>
         <p:nvSpPr>
@@ -4084,6 +4195,13 @@
             <a:prstDash val="solid"/>
           </a:ln>
         </p:spPr>
+        <p:txBody>
+          <a:bodyPr/>
+          <a:lstStyle/>
+          <a:p>
+            <a:endParaRPr lang="en-US"/>
+          </a:p>
+        </p:txBody>
       </p:sp>
       <p:sp>
         <p:nvSpPr>
@@ -4106,7 +4224,7 @@
           <a:bodyPr wrap="square" lIns="0" tIns="0" rIns="0" bIns="0" rtlCol="0" anchor="ctr"/>
           <a:lstStyle/>
           <a:p>
-            <a:pPr algn="ctr" indent="0" marL="0">
+            <a:pPr marL="0" indent="0" algn="ctr">
               <a:buNone/>
             </a:pPr>
             <a:r>
@@ -4145,7 +4263,7 @@
           <a:bodyPr wrap="square" lIns="0" tIns="0" rIns="0" bIns="0" rtlCol="0" anchor="ctr"/>
           <a:lstStyle/>
           <a:p>
-            <a:pPr indent="0" marL="0">
+            <a:pPr marL="0" indent="0">
               <a:buNone/>
             </a:pPr>
             <a:r>
@@ -4184,7 +4302,7 @@
           <a:bodyPr wrap="square" lIns="0" tIns="0" rIns="0" bIns="0" rtlCol="0" anchor="t"/>
           <a:lstStyle/>
           <a:p>
-            <a:pPr indent="0" marL="0">
+            <a:pPr marL="0" indent="0">
               <a:buNone/>
             </a:pPr>
             <a:r>
@@ -4201,7 +4319,7 @@
             <a:endParaRPr lang="en-US" sz="920" dirty="0"/>
           </a:p>
           <a:p>
-            <a:pPr indent="0" marL="0">
+            <a:pPr marL="0" indent="0">
               <a:buNone/>
             </a:pPr>
             <a:r>
@@ -4249,13 +4367,20 @@
             <a:prstDash val="solid"/>
           </a:ln>
           <a:effectLst>
-            <a:outerShdw sx="100000" sy="100000" kx="0" ky="0" algn="bl" rotWithShape="0" blurRad="660767388140000000000" dist="495575541105000000000" dir="3.4992e+25">
+            <a:outerShdw algn="bl" rotWithShape="0">
               <a:srgbClr val="000000">
-                <a:alpha val="3.2e+24"/>
+                <a:alpha val="0"/>
               </a:srgbClr>
             </a:outerShdw>
           </a:effectLst>
         </p:spPr>
+        <p:txBody>
+          <a:bodyPr/>
+          <a:lstStyle/>
+          <a:p>
+            <a:endParaRPr lang="en-US"/>
+          </a:p>
+        </p:txBody>
       </p:sp>
       <p:sp>
         <p:nvSpPr>
@@ -4283,6 +4408,13 @@
             <a:prstDash val="solid"/>
           </a:ln>
         </p:spPr>
+        <p:txBody>
+          <a:bodyPr/>
+          <a:lstStyle/>
+          <a:p>
+            <a:endParaRPr lang="en-US"/>
+          </a:p>
+        </p:txBody>
       </p:sp>
       <p:sp>
         <p:nvSpPr>
@@ -4312,6 +4444,13 @@
             <a:prstDash val="solid"/>
           </a:ln>
         </p:spPr>
+        <p:txBody>
+          <a:bodyPr/>
+          <a:lstStyle/>
+          <a:p>
+            <a:endParaRPr lang="en-US"/>
+          </a:p>
+        </p:txBody>
       </p:sp>
       <p:sp>
         <p:nvSpPr>
@@ -4334,7 +4473,7 @@
           <a:bodyPr wrap="square" lIns="0" tIns="0" rIns="0" bIns="0" rtlCol="0" anchor="ctr"/>
           <a:lstStyle/>
           <a:p>
-            <a:pPr algn="ctr" indent="0" marL="0">
+            <a:pPr marL="0" indent="0" algn="ctr">
               <a:buNone/>
             </a:pPr>
             <a:r>
@@ -4373,7 +4512,7 @@
           <a:bodyPr wrap="square" lIns="0" tIns="0" rIns="0" bIns="0" rtlCol="0" anchor="ctr"/>
           <a:lstStyle/>
           <a:p>
-            <a:pPr indent="0" marL="0">
+            <a:pPr marL="0" indent="0">
               <a:buNone/>
             </a:pPr>
             <a:r>
@@ -4412,7 +4551,7 @@
           <a:bodyPr wrap="square" lIns="0" tIns="0" rIns="0" bIns="0" rtlCol="0" anchor="t"/>
           <a:lstStyle/>
           <a:p>
-            <a:pPr indent="0" marL="0">
+            <a:pPr marL="0" indent="0">
               <a:buNone/>
             </a:pPr>
             <a:r>
@@ -4429,7 +4568,7 @@
             <a:endParaRPr lang="en-US" sz="920" dirty="0"/>
           </a:p>
           <a:p>
-            <a:pPr indent="0" marL="0">
+            <a:pPr marL="0" indent="0">
               <a:buNone/>
             </a:pPr>
             <a:r>
@@ -4477,13 +4616,20 @@
             <a:prstDash val="solid"/>
           </a:ln>
           <a:effectLst>
-            <a:outerShdw sx="100000" sy="100000" kx="0" ky="0" algn="bl" rotWithShape="0" blurRad="8.391745829378e+24" dist="6.2938093720335e+24" dir="2.09952e+30">
+            <a:outerShdw algn="bl" rotWithShape="0">
               <a:srgbClr val="000000">
-                <a:alpha val="3.2e+29"/>
+                <a:alpha val="0"/>
               </a:srgbClr>
             </a:outerShdw>
           </a:effectLst>
         </p:spPr>
+        <p:txBody>
+          <a:bodyPr/>
+          <a:lstStyle/>
+          <a:p>
+            <a:endParaRPr lang="en-US"/>
+          </a:p>
+        </p:txBody>
       </p:sp>
       <p:sp>
         <p:nvSpPr>
@@ -4511,6 +4657,13 @@
             <a:prstDash val="solid"/>
           </a:ln>
         </p:spPr>
+        <p:txBody>
+          <a:bodyPr/>
+          <a:lstStyle/>
+          <a:p>
+            <a:endParaRPr lang="en-US"/>
+          </a:p>
+        </p:txBody>
       </p:sp>
       <p:sp>
         <p:nvSpPr>
@@ -4540,6 +4693,13 @@
             <a:prstDash val="solid"/>
           </a:ln>
         </p:spPr>
+        <p:txBody>
+          <a:bodyPr/>
+          <a:lstStyle/>
+          <a:p>
+            <a:endParaRPr lang="en-US"/>
+          </a:p>
+        </p:txBody>
       </p:sp>
       <p:sp>
         <p:nvSpPr>
@@ -4562,7 +4722,7 @@
           <a:bodyPr wrap="square" lIns="0" tIns="0" rIns="0" bIns="0" rtlCol="0" anchor="ctr"/>
           <a:lstStyle/>
           <a:p>
-            <a:pPr algn="ctr" indent="0" marL="0">
+            <a:pPr marL="0" indent="0" algn="ctr">
               <a:buNone/>
             </a:pPr>
             <a:r>
@@ -4601,7 +4761,7 @@
           <a:bodyPr wrap="square" lIns="0" tIns="0" rIns="0" bIns="0" rtlCol="0" anchor="ctr"/>
           <a:lstStyle/>
           <a:p>
-            <a:pPr indent="0" marL="0">
+            <a:pPr marL="0" indent="0">
               <a:buNone/>
             </a:pPr>
             <a:r>
@@ -4640,7 +4800,7 @@
           <a:bodyPr wrap="square" lIns="0" tIns="0" rIns="0" bIns="0" rtlCol="0" anchor="t"/>
           <a:lstStyle/>
           <a:p>
-            <a:pPr indent="0" marL="0">
+            <a:pPr marL="0" indent="0">
               <a:buNone/>
             </a:pPr>
             <a:r>
@@ -4657,7 +4817,7 @@
             <a:endParaRPr lang="en-US" sz="920" dirty="0"/>
           </a:p>
           <a:p>
-            <a:pPr indent="0" marL="0">
+            <a:pPr marL="0" indent="0">
               <a:buNone/>
             </a:pPr>
             <a:r>
@@ -4705,13 +4865,20 @@
             <a:prstDash val="solid"/>
           </a:ln>
           <a:effectLst>
-            <a:outerShdw sx="100000" sy="100000" kx="0" ky="0" algn="bl" rotWithShape="0" blurRad="1.0657517203310059e+29" dist="7.993137902482545e+28" dir="1.259712e+35">
+            <a:outerShdw algn="bl" rotWithShape="0">
               <a:srgbClr val="000000">
-                <a:alpha val="3.2e+34"/>
+                <a:alpha val="0"/>
               </a:srgbClr>
             </a:outerShdw>
           </a:effectLst>
         </p:spPr>
+        <p:txBody>
+          <a:bodyPr/>
+          <a:lstStyle/>
+          <a:p>
+            <a:endParaRPr lang="en-US"/>
+          </a:p>
+        </p:txBody>
       </p:sp>
       <p:sp>
         <p:nvSpPr>
@@ -4739,6 +4906,13 @@
             <a:prstDash val="solid"/>
           </a:ln>
         </p:spPr>
+        <p:txBody>
+          <a:bodyPr/>
+          <a:lstStyle/>
+          <a:p>
+            <a:endParaRPr lang="en-US"/>
+          </a:p>
+        </p:txBody>
       </p:sp>
       <p:sp>
         <p:nvSpPr>
@@ -4768,6 +4942,13 @@
             <a:prstDash val="solid"/>
           </a:ln>
         </p:spPr>
+        <p:txBody>
+          <a:bodyPr/>
+          <a:lstStyle/>
+          <a:p>
+            <a:endParaRPr lang="en-US"/>
+          </a:p>
+        </p:txBody>
       </p:sp>
       <p:sp>
         <p:nvSpPr>
@@ -4790,7 +4971,7 @@
           <a:bodyPr wrap="square" lIns="0" tIns="0" rIns="0" bIns="0" rtlCol="0" anchor="ctr"/>
           <a:lstStyle/>
           <a:p>
-            <a:pPr algn="ctr" indent="0" marL="0">
+            <a:pPr marL="0" indent="0" algn="ctr">
               <a:buNone/>
             </a:pPr>
             <a:r>
@@ -4829,7 +5010,7 @@
           <a:bodyPr wrap="square" lIns="0" tIns="0" rIns="0" bIns="0" rtlCol="0" anchor="ctr"/>
           <a:lstStyle/>
           <a:p>
-            <a:pPr indent="0" marL="0">
+            <a:pPr marL="0" indent="0">
               <a:buNone/>
             </a:pPr>
             <a:r>
@@ -4868,7 +5049,7 @@
           <a:bodyPr wrap="square" lIns="0" tIns="0" rIns="0" bIns="0" rtlCol="0" anchor="t"/>
           <a:lstStyle/>
           <a:p>
-            <a:pPr indent="0" marL="0">
+            <a:pPr marL="0" indent="0">
               <a:buNone/>
             </a:pPr>
             <a:r>
@@ -4885,7 +5066,7 @@
             <a:endParaRPr lang="en-US" sz="920" dirty="0"/>
           </a:p>
           <a:p>
-            <a:pPr indent="0" marL="0">
+            <a:pPr marL="0" indent="0">
               <a:buNone/>
             </a:pPr>
             <a:r>
@@ -4933,13 +5114,20 @@
             <a:prstDash val="solid"/>
           </a:ln>
           <a:effectLst>
-            <a:outerShdw sx="100000" sy="100000" kx="0" ky="0" algn="bl" rotWithShape="0" blurRad="1.3535046848203775e+33" dist="1.0151285136152831e+33" dir="7.558272e+39">
+            <a:outerShdw algn="bl" rotWithShape="0">
               <a:srgbClr val="000000">
-                <a:alpha val="3.2e+39"/>
+                <a:alpha val="0"/>
               </a:srgbClr>
             </a:outerShdw>
           </a:effectLst>
         </p:spPr>
+        <p:txBody>
+          <a:bodyPr/>
+          <a:lstStyle/>
+          <a:p>
+            <a:endParaRPr lang="en-US"/>
+          </a:p>
+        </p:txBody>
       </p:sp>
       <p:sp>
         <p:nvSpPr>
@@ -4967,6 +5155,13 @@
             <a:prstDash val="solid"/>
           </a:ln>
         </p:spPr>
+        <p:txBody>
+          <a:bodyPr/>
+          <a:lstStyle/>
+          <a:p>
+            <a:endParaRPr lang="en-US"/>
+          </a:p>
+        </p:txBody>
       </p:sp>
       <p:sp>
         <p:nvSpPr>
@@ -4996,6 +5191,13 @@
             <a:prstDash val="solid"/>
           </a:ln>
         </p:spPr>
+        <p:txBody>
+          <a:bodyPr/>
+          <a:lstStyle/>
+          <a:p>
+            <a:endParaRPr lang="en-US"/>
+          </a:p>
+        </p:txBody>
       </p:sp>
       <p:sp>
         <p:nvSpPr>
@@ -5018,7 +5220,7 @@
           <a:bodyPr wrap="square" lIns="0" tIns="0" rIns="0" bIns="0" rtlCol="0" anchor="ctr"/>
           <a:lstStyle/>
           <a:p>
-            <a:pPr algn="ctr" indent="0" marL="0">
+            <a:pPr marL="0" indent="0" algn="ctr">
               <a:buNone/>
             </a:pPr>
             <a:r>
@@ -5057,7 +5259,7 @@
           <a:bodyPr wrap="square" lIns="0" tIns="0" rIns="0" bIns="0" rtlCol="0" anchor="ctr"/>
           <a:lstStyle/>
           <a:p>
-            <a:pPr indent="0" marL="0">
+            <a:pPr marL="0" indent="0">
               <a:buNone/>
             </a:pPr>
             <a:r>
@@ -5074,7 +5276,7 @@
             <a:endParaRPr lang="en-US" sz="1260" dirty="0"/>
           </a:p>
           <a:p>
-            <a:pPr indent="0" marL="0">
+            <a:pPr marL="0" indent="0">
               <a:buNone/>
             </a:pPr>
             <a:r>
@@ -5113,7 +5315,7 @@
           <a:bodyPr wrap="square" lIns="0" tIns="0" rIns="0" bIns="0" rtlCol="0" anchor="t"/>
           <a:lstStyle/>
           <a:p>
-            <a:pPr indent="0" marL="0">
+            <a:pPr marL="0" indent="0">
               <a:buNone/>
             </a:pPr>
             <a:r>
@@ -5130,7 +5332,7 @@
             <a:endParaRPr lang="en-US" sz="920" dirty="0"/>
           </a:p>
           <a:p>
-            <a:pPr indent="0" marL="0">
+            <a:pPr marL="0" indent="0">
               <a:buNone/>
             </a:pPr>
             <a:r>
@@ -5178,13 +5380,20 @@
             <a:prstDash val="solid"/>
           </a:ln>
           <a:effectLst>
-            <a:outerShdw sx="100000" sy="100000" kx="0" ky="0" algn="bl" rotWithShape="0" blurRad="1.7189509497218795e+37" dist="1.2892132122914095e+37" dir="4.5349632000000006e+44">
+            <a:outerShdw algn="bl" rotWithShape="0">
               <a:srgbClr val="000000">
-                <a:alpha val="3.2e+44"/>
+                <a:alpha val="0"/>
               </a:srgbClr>
             </a:outerShdw>
           </a:effectLst>
         </p:spPr>
+        <p:txBody>
+          <a:bodyPr/>
+          <a:lstStyle/>
+          <a:p>
+            <a:endParaRPr lang="en-US"/>
+          </a:p>
+        </p:txBody>
       </p:sp>
       <p:sp>
         <p:nvSpPr>
@@ -5212,6 +5421,13 @@
             <a:prstDash val="solid"/>
           </a:ln>
         </p:spPr>
+        <p:txBody>
+          <a:bodyPr/>
+          <a:lstStyle/>
+          <a:p>
+            <a:endParaRPr lang="en-US"/>
+          </a:p>
+        </p:txBody>
       </p:sp>
       <p:sp>
         <p:nvSpPr>
@@ -5234,7 +5450,7 @@
           <a:bodyPr wrap="square" lIns="0" tIns="0" rIns="0" bIns="0" rtlCol="0" anchor="ctr"/>
           <a:lstStyle/>
           <a:p>
-            <a:pPr indent="0" marL="0">
+            <a:pPr marL="0" indent="0">
               <a:buNone/>
             </a:pPr>
             <a:r>
@@ -5273,7 +5489,7 @@
           <a:bodyPr wrap="square" lIns="0" tIns="0" rIns="0" bIns="0" rtlCol="0" anchor="ctr"/>
           <a:lstStyle/>
           <a:p>
-            <a:pPr indent="0" marL="0">
+            <a:pPr marL="0" indent="0">
               <a:buNone/>
             </a:pPr>
             <a:r>
@@ -5321,6 +5537,13 @@
             <a:prstDash val="solid"/>
           </a:ln>
         </p:spPr>
+        <p:txBody>
+          <a:bodyPr/>
+          <a:lstStyle/>
+          <a:p>
+            <a:endParaRPr lang="en-US"/>
+          </a:p>
+        </p:txBody>
       </p:sp>
       <p:sp>
         <p:nvSpPr>
@@ -5350,6 +5573,13 @@
             <a:prstDash val="solid"/>
           </a:ln>
         </p:spPr>
+        <p:txBody>
+          <a:bodyPr/>
+          <a:lstStyle/>
+          <a:p>
+            <a:endParaRPr lang="en-US"/>
+          </a:p>
+        </p:txBody>
       </p:sp>
       <p:sp>
         <p:nvSpPr>
@@ -5372,7 +5602,7 @@
           <a:bodyPr wrap="square" lIns="0" tIns="0" rIns="0" bIns="0" rtlCol="0" anchor="ctr"/>
           <a:lstStyle/>
           <a:p>
-            <a:pPr algn="ctr" indent="0" marL="0">
+            <a:pPr marL="0" indent="0" algn="ctr">
               <a:buNone/>
             </a:pPr>
             <a:r>
@@ -5418,6 +5648,13 @@
             <a:prstDash val="solid"/>
           </a:ln>
         </p:spPr>
+        <p:txBody>
+          <a:bodyPr/>
+          <a:lstStyle/>
+          <a:p>
+            <a:endParaRPr lang="en-US"/>
+          </a:p>
+        </p:txBody>
       </p:sp>
       <p:sp>
         <p:nvSpPr>
@@ -5440,7 +5677,7 @@
           <a:bodyPr wrap="square" lIns="0" tIns="0" rIns="0" bIns="0" rtlCol="0" anchor="ctr"/>
           <a:lstStyle/>
           <a:p>
-            <a:pPr algn="ctr" indent="0" marL="0">
+            <a:pPr marL="0" indent="0" algn="ctr">
               <a:buNone/>
             </a:pPr>
             <a:r>
@@ -5486,6 +5723,13 @@
             <a:prstDash val="solid"/>
           </a:ln>
         </p:spPr>
+        <p:txBody>
+          <a:bodyPr/>
+          <a:lstStyle/>
+          <a:p>
+            <a:endParaRPr lang="en-US"/>
+          </a:p>
+        </p:txBody>
       </p:sp>
       <p:sp>
         <p:nvSpPr>
@@ -5508,7 +5752,7 @@
           <a:bodyPr wrap="square" lIns="0" tIns="0" rIns="0" bIns="0" rtlCol="0" anchor="ctr"/>
           <a:lstStyle/>
           <a:p>
-            <a:pPr algn="ctr" indent="0" marL="0">
+            <a:pPr marL="0" indent="0" algn="ctr">
               <a:buNone/>
             </a:pPr>
             <a:r>
@@ -5554,6 +5798,13 @@
             <a:prstDash val="solid"/>
           </a:ln>
         </p:spPr>
+        <p:txBody>
+          <a:bodyPr/>
+          <a:lstStyle/>
+          <a:p>
+            <a:endParaRPr lang="en-US"/>
+          </a:p>
+        </p:txBody>
       </p:sp>
       <p:sp>
         <p:nvSpPr>
@@ -5576,7 +5827,7 @@
           <a:bodyPr wrap="square" lIns="0" tIns="0" rIns="0" bIns="0" rtlCol="0" anchor="ctr"/>
           <a:lstStyle/>
           <a:p>
-            <a:pPr algn="ctr" indent="0" marL="0">
+            <a:pPr marL="0" indent="0" algn="ctr">
               <a:buNone/>
             </a:pPr>
             <a:r>
@@ -5622,6 +5873,13 @@
             <a:prstDash val="solid"/>
           </a:ln>
         </p:spPr>
+        <p:txBody>
+          <a:bodyPr/>
+          <a:lstStyle/>
+          <a:p>
+            <a:endParaRPr lang="en-US"/>
+          </a:p>
+        </p:txBody>
       </p:sp>
       <p:sp>
         <p:nvSpPr>
@@ -5644,7 +5902,7 @@
           <a:bodyPr wrap="square" lIns="0" tIns="0" rIns="0" bIns="0" rtlCol="0" anchor="ctr"/>
           <a:lstStyle/>
           <a:p>
-            <a:pPr algn="ctr" indent="0" marL="0">
+            <a:pPr marL="0" indent="0" algn="ctr">
               <a:buNone/>
             </a:pPr>
             <a:r>
@@ -5692,6 +5950,13 @@
             <a:prstDash val="solid"/>
           </a:ln>
         </p:spPr>
+        <p:txBody>
+          <a:bodyPr/>
+          <a:lstStyle/>
+          <a:p>
+            <a:endParaRPr lang="en-US"/>
+          </a:p>
+        </p:txBody>
       </p:sp>
       <p:sp>
         <p:nvSpPr>
@@ -5714,7 +5979,7 @@
           <a:bodyPr wrap="square" lIns="0" tIns="0" rIns="0" bIns="0" rtlCol="0" anchor="ctr"/>
           <a:lstStyle/>
           <a:p>
-            <a:pPr indent="0" marL="0">
+            <a:pPr marL="0" indent="0">
               <a:buNone/>
             </a:pPr>
             <a:r>
@@ -5762,6 +6027,13 @@
             <a:prstDash val="solid"/>
           </a:ln>
         </p:spPr>
+        <p:txBody>
+          <a:bodyPr/>
+          <a:lstStyle/>
+          <a:p>
+            <a:endParaRPr lang="en-US"/>
+          </a:p>
+        </p:txBody>
       </p:sp>
       <p:sp>
         <p:nvSpPr>
@@ -5791,6 +6063,13 @@
             <a:prstDash val="solid"/>
           </a:ln>
         </p:spPr>
+        <p:txBody>
+          <a:bodyPr/>
+          <a:lstStyle/>
+          <a:p>
+            <a:endParaRPr lang="en-US"/>
+          </a:p>
+        </p:txBody>
       </p:sp>
       <p:sp>
         <p:nvSpPr>
@@ -5813,7 +6092,7 @@
           <a:bodyPr wrap="square" lIns="0" tIns="0" rIns="0" bIns="0" rtlCol="0" anchor="ctr"/>
           <a:lstStyle/>
           <a:p>
-            <a:pPr indent="0" marL="0">
+            <a:pPr marL="0" indent="0">
               <a:buNone/>
             </a:pPr>
             <a:r>
@@ -5852,7 +6131,7 @@
           <a:bodyPr wrap="square" lIns="0" tIns="0" rIns="0" bIns="0" rtlCol="0" anchor="ctr"/>
           <a:lstStyle/>
           <a:p>
-            <a:pPr indent="0" marL="0">
+            <a:pPr marL="0" indent="0">
               <a:buNone/>
             </a:pPr>
             <a:r>
@@ -5900,6 +6179,13 @@
             <a:prstDash val="solid"/>
           </a:ln>
         </p:spPr>
+        <p:txBody>
+          <a:bodyPr/>
+          <a:lstStyle/>
+          <a:p>
+            <a:endParaRPr lang="en-US"/>
+          </a:p>
+        </p:txBody>
       </p:sp>
       <p:sp>
         <p:nvSpPr>
@@ -5929,6 +6215,13 @@
             <a:prstDash val="solid"/>
           </a:ln>
         </p:spPr>
+        <p:txBody>
+          <a:bodyPr/>
+          <a:lstStyle/>
+          <a:p>
+            <a:endParaRPr lang="en-US"/>
+          </a:p>
+        </p:txBody>
       </p:sp>
       <p:sp>
         <p:nvSpPr>
@@ -5951,7 +6244,7 @@
           <a:bodyPr wrap="square" lIns="0" tIns="0" rIns="0" bIns="0" rtlCol="0" anchor="ctr"/>
           <a:lstStyle/>
           <a:p>
-            <a:pPr indent="0" marL="0">
+            <a:pPr marL="0" indent="0">
               <a:buNone/>
             </a:pPr>
             <a:r>
@@ -5990,7 +6283,7 @@
           <a:bodyPr wrap="square" lIns="0" tIns="0" rIns="0" bIns="0" rtlCol="0" anchor="ctr"/>
           <a:lstStyle/>
           <a:p>
-            <a:pPr indent="0" marL="0">
+            <a:pPr marL="0" indent="0">
               <a:buNone/>
             </a:pPr>
             <a:r>
@@ -6038,6 +6331,13 @@
             <a:prstDash val="solid"/>
           </a:ln>
         </p:spPr>
+        <p:txBody>
+          <a:bodyPr/>
+          <a:lstStyle/>
+          <a:p>
+            <a:endParaRPr lang="en-US"/>
+          </a:p>
+        </p:txBody>
       </p:sp>
       <p:sp>
         <p:nvSpPr>
@@ -6067,6 +6367,13 @@
             <a:prstDash val="solid"/>
           </a:ln>
         </p:spPr>
+        <p:txBody>
+          <a:bodyPr/>
+          <a:lstStyle/>
+          <a:p>
+            <a:endParaRPr lang="en-US"/>
+          </a:p>
+        </p:txBody>
       </p:sp>
       <p:sp>
         <p:nvSpPr>
@@ -6089,7 +6396,7 @@
           <a:bodyPr wrap="square" lIns="0" tIns="0" rIns="0" bIns="0" rtlCol="0" anchor="ctr"/>
           <a:lstStyle/>
           <a:p>
-            <a:pPr indent="0" marL="0">
+            <a:pPr marL="0" indent="0">
               <a:buNone/>
             </a:pPr>
             <a:r>
@@ -6128,7 +6435,7 @@
           <a:bodyPr wrap="square" lIns="0" tIns="0" rIns="0" bIns="0" rtlCol="0" anchor="ctr"/>
           <a:lstStyle/>
           <a:p>
-            <a:pPr indent="0" marL="0">
+            <a:pPr marL="0" indent="0">
               <a:buNone/>
             </a:pPr>
             <a:r>
@@ -6176,6 +6483,13 @@
             <a:prstDash val="solid"/>
           </a:ln>
         </p:spPr>
+        <p:txBody>
+          <a:bodyPr/>
+          <a:lstStyle/>
+          <a:p>
+            <a:endParaRPr lang="en-US"/>
+          </a:p>
+        </p:txBody>
       </p:sp>
       <p:sp>
         <p:nvSpPr>
@@ -6205,6 +6519,13 @@
             <a:prstDash val="solid"/>
           </a:ln>
         </p:spPr>
+        <p:txBody>
+          <a:bodyPr/>
+          <a:lstStyle/>
+          <a:p>
+            <a:endParaRPr lang="en-US"/>
+          </a:p>
+        </p:txBody>
       </p:sp>
       <p:sp>
         <p:nvSpPr>
@@ -6227,7 +6548,7 @@
           <a:bodyPr wrap="square" lIns="0" tIns="0" rIns="0" bIns="0" rtlCol="0" anchor="ctr"/>
           <a:lstStyle/>
           <a:p>
-            <a:pPr indent="0" marL="0">
+            <a:pPr marL="0" indent="0">
               <a:buNone/>
             </a:pPr>
             <a:r>
@@ -6266,7 +6587,7 @@
           <a:bodyPr wrap="square" lIns="0" tIns="0" rIns="0" bIns="0" rtlCol="0" anchor="ctr"/>
           <a:lstStyle/>
           <a:p>
-            <a:pPr indent="0" marL="0">
+            <a:pPr marL="0" indent="0">
               <a:buNone/>
             </a:pPr>
             <a:r>
@@ -6305,7 +6626,7 @@
           <a:bodyPr wrap="square" lIns="0" tIns="0" rIns="0" bIns="0" rtlCol="0" anchor="ctr"/>
           <a:lstStyle/>
           <a:p>
-            <a:pPr indent="0" marL="0">
+            <a:pPr marL="0" indent="0">
               <a:buNone/>
             </a:pPr>
             <a:r>
@@ -6325,7 +6646,7 @@
       </p:sp>
       <p:sp>
         <p:nvSpPr>
-          <p:cNvPr id="25" name="Slide Number Placeholder 0"/>
+          <p:cNvPr id="92" name="Slide Number Placeholder 0"/>
           <p:cNvSpPr>
             <a:spLocks noGrp="1"/>
           </p:cNvSpPr>
@@ -6343,7 +6664,7 @@
           </a:prstGeom>
           <a:extLst>
             <a:ext uri="{C572A759-6A51-4108-AA02-DFA0A04FC94B}">
-              <ma14:wrappingTextBoxFlag xmlns:ma14="http://schemas.microsoft.com/office/mac/drawingml/2011/main" val="0"/>
+              <ma14:wrappingTextBoxFlag xmlns:ma14="http://schemas.microsoft.com/office/mac/drawingml/2011/main" xmlns="" val="0"/>
             </a:ext>
           </a:extLst>
         </p:spPr>
@@ -6364,7 +6685,7 @@
           <a:p>
             <a:pPr algn="l"/>
             <a:fld id="{F7021451-1387-4CA6-816F-3879F97B5CBC}" type="slidenum">
-              <a:rPr b="0" lang="en-US"/>
+              <a:rPr lang="en-US" b="0"/>
               <a:t>2</a:t>
             </a:fld>
             <a:endParaRPr lang="en-US"/>
@@ -6398,15 +6719,15 @@
       </p:grpSpPr>
       <p:pic>
         <p:nvPicPr>
-          <p:cNvPr id="2" name="Image 0" descr="/mnt/data/macro_ultra_modern_work/assets/bg3_dark.png">    </p:cNvPr>
+          <p:cNvPr id="2" name="Image 0" descr="/mnt/data/macro_ultra_modern_work/assets/bg3_dark.png"/>
           <p:cNvPicPr>
             <a:picLocks noChangeAspect="1"/>
           </p:cNvPicPr>
           <p:nvPr/>
         </p:nvPicPr>
         <p:blipFill>
-          <a:blip r:embed="rId1"/>
-          <a:srcRect l="0" r="0" t="29687" b="29687"/>
+          <a:blip r:embed="rId3"/>
+          <a:srcRect t="29687" b="29687"/>
           <a:stretch/>
         </p:blipFill>
         <p:spPr>
@@ -6445,6 +6766,13 @@
             <a:prstDash val="solid"/>
           </a:ln>
         </p:spPr>
+        <p:txBody>
+          <a:bodyPr/>
+          <a:lstStyle/>
+          <a:p>
+            <a:endParaRPr lang="en-US"/>
+          </a:p>
+        </p:txBody>
       </p:sp>
       <p:sp>
         <p:nvSpPr>
@@ -6472,6 +6800,13 @@
             <a:prstDash val="solid"/>
           </a:ln>
         </p:spPr>
+        <p:txBody>
+          <a:bodyPr/>
+          <a:lstStyle/>
+          <a:p>
+            <a:endParaRPr lang="en-US"/>
+          </a:p>
+        </p:txBody>
       </p:sp>
       <p:sp>
         <p:nvSpPr>
@@ -6499,6 +6834,13 @@
             <a:prstDash val="solid"/>
           </a:ln>
         </p:spPr>
+        <p:txBody>
+          <a:bodyPr/>
+          <a:lstStyle/>
+          <a:p>
+            <a:endParaRPr lang="en-US"/>
+          </a:p>
+        </p:txBody>
       </p:sp>
       <p:sp>
         <p:nvSpPr>
@@ -6526,6 +6868,13 @@
             <a:prstDash val="solid"/>
           </a:ln>
         </p:spPr>
+        <p:txBody>
+          <a:bodyPr/>
+          <a:lstStyle/>
+          <a:p>
+            <a:endParaRPr lang="en-US"/>
+          </a:p>
+        </p:txBody>
       </p:sp>
       <p:sp>
         <p:nvSpPr>
@@ -6553,6 +6902,13 @@
             <a:prstDash val="solid"/>
           </a:ln>
         </p:spPr>
+        <p:txBody>
+          <a:bodyPr/>
+          <a:lstStyle/>
+          <a:p>
+            <a:endParaRPr lang="en-US"/>
+          </a:p>
+        </p:txBody>
       </p:sp>
       <p:sp>
         <p:nvSpPr>
@@ -6575,7 +6931,7 @@
           <a:bodyPr wrap="square" lIns="0" tIns="0" rIns="0" bIns="0" rtlCol="0" anchor="ctr"/>
           <a:lstStyle/>
           <a:p>
-            <a:pPr indent="0" marL="0">
+            <a:pPr marL="0" indent="0">
               <a:buNone/>
             </a:pPr>
             <a:r>
@@ -6614,7 +6970,7 @@
           <a:bodyPr wrap="square" lIns="0" tIns="0" rIns="0" bIns="0" rtlCol="0" anchor="ctr"/>
           <a:lstStyle/>
           <a:p>
-            <a:pPr indent="0" marL="0">
+            <a:pPr marL="0" indent="0">
               <a:buNone/>
             </a:pPr>
             <a:r>
@@ -6631,7 +6987,7 @@
             <a:endParaRPr lang="en-US" sz="2300" dirty="0"/>
           </a:p>
           <a:p>
-            <a:pPr indent="0" marL="0">
+            <a:pPr marL="0" indent="0">
               <a:buNone/>
             </a:pPr>
             <a:r>
@@ -6670,7 +7026,7 @@
           <a:bodyPr wrap="square" lIns="0" tIns="0" rIns="0" bIns="0" rtlCol="0" anchor="ctr"/>
           <a:lstStyle/>
           <a:p>
-            <a:pPr indent="0" marL="0">
+            <a:pPr marL="0" indent="0">
               <a:buNone/>
             </a:pPr>
             <a:r>
@@ -6718,13 +7074,20 @@
             <a:prstDash val="solid"/>
           </a:ln>
           <a:effectLst>
-            <a:outerShdw sx="100000" sy="100000" kx="0" ky="0" algn="bl" rotWithShape="0" blurRad="2.183067706146787e+41" dist="1.6373007796100902e+41" dir="2.72097792e+49">
+            <a:outerShdw algn="bl" rotWithShape="0">
               <a:srgbClr val="000000">
-                <a:alpha val="3.2e+49"/>
+                <a:alpha val="0"/>
               </a:srgbClr>
             </a:outerShdw>
           </a:effectLst>
         </p:spPr>
+        <p:txBody>
+          <a:bodyPr/>
+          <a:lstStyle/>
+          <a:p>
+            <a:endParaRPr lang="en-US"/>
+          </a:p>
+        </p:txBody>
       </p:sp>
       <p:sp>
         <p:nvSpPr>
@@ -6752,6 +7115,13 @@
             <a:prstDash val="solid"/>
           </a:ln>
         </p:spPr>
+        <p:txBody>
+          <a:bodyPr/>
+          <a:lstStyle/>
+          <a:p>
+            <a:endParaRPr lang="en-US"/>
+          </a:p>
+        </p:txBody>
       </p:sp>
       <p:sp>
         <p:nvSpPr>
@@ -6781,6 +7151,13 @@
             <a:prstDash val="solid"/>
           </a:ln>
         </p:spPr>
+        <p:txBody>
+          <a:bodyPr/>
+          <a:lstStyle/>
+          <a:p>
+            <a:endParaRPr lang="en-US"/>
+          </a:p>
+        </p:txBody>
       </p:sp>
       <p:sp>
         <p:nvSpPr>
@@ -6803,7 +7180,7 @@
           <a:bodyPr wrap="square" lIns="0" tIns="0" rIns="0" bIns="0" rtlCol="0" anchor="ctr"/>
           <a:lstStyle/>
           <a:p>
-            <a:pPr algn="ctr" indent="0" marL="0">
+            <a:pPr marL="0" indent="0" algn="ctr">
               <a:buNone/>
             </a:pPr>
             <a:r>
@@ -6849,6 +7226,13 @@
             <a:prstDash val="solid"/>
           </a:ln>
         </p:spPr>
+        <p:txBody>
+          <a:bodyPr/>
+          <a:lstStyle/>
+          <a:p>
+            <a:endParaRPr lang="en-US"/>
+          </a:p>
+        </p:txBody>
       </p:sp>
       <p:sp>
         <p:nvSpPr>
@@ -6871,7 +7255,7 @@
           <a:bodyPr wrap="square" lIns="0" tIns="0" rIns="0" bIns="0" rtlCol="0" anchor="ctr"/>
           <a:lstStyle/>
           <a:p>
-            <a:pPr algn="ctr" indent="0" marL="0">
+            <a:pPr marL="0" indent="0" algn="ctr">
               <a:buNone/>
             </a:pPr>
             <a:r>
@@ -6910,7 +7294,7 @@
           <a:bodyPr wrap="square" lIns="0" tIns="0" rIns="0" bIns="0" rtlCol="0" anchor="ctr"/>
           <a:lstStyle/>
           <a:p>
-            <a:pPr indent="0" marL="0">
+            <a:pPr marL="0" indent="0">
               <a:buNone/>
             </a:pPr>
             <a:r>
@@ -6949,7 +7333,7 @@
           <a:bodyPr wrap="square" lIns="0" tIns="0" rIns="0" bIns="0" rtlCol="0" anchor="t"/>
           <a:lstStyle/>
           <a:p>
-            <a:pPr indent="0" marL="0">
+            <a:pPr marL="0" indent="0">
               <a:buNone/>
             </a:pPr>
             <a:r>
@@ -6966,7 +7350,7 @@
             <a:endParaRPr lang="en-US" sz="1020" dirty="0"/>
           </a:p>
           <a:p>
-            <a:pPr indent="0" marL="0">
+            <a:pPr marL="0" indent="0">
               <a:buNone/>
             </a:pPr>
             <a:r>
@@ -7014,13 +7398,20 @@
             <a:prstDash val="solid"/>
           </a:ln>
           <a:effectLst>
-            <a:outerShdw sx="100000" sy="100000" kx="0" ky="0" algn="bl" rotWithShape="0" blurRad="2.7724959868064195e+45" dist="2.0793719901048145e+45" dir="1.6325867520000003e+54">
+            <a:outerShdw algn="bl" rotWithShape="0">
               <a:srgbClr val="000000">
-                <a:alpha val="3.2e+54"/>
+                <a:alpha val="0"/>
               </a:srgbClr>
             </a:outerShdw>
           </a:effectLst>
         </p:spPr>
+        <p:txBody>
+          <a:bodyPr/>
+          <a:lstStyle/>
+          <a:p>
+            <a:endParaRPr lang="en-US"/>
+          </a:p>
+        </p:txBody>
       </p:sp>
       <p:sp>
         <p:nvSpPr>
@@ -7048,6 +7439,13 @@
             <a:prstDash val="solid"/>
           </a:ln>
         </p:spPr>
+        <p:txBody>
+          <a:bodyPr/>
+          <a:lstStyle/>
+          <a:p>
+            <a:endParaRPr lang="en-US"/>
+          </a:p>
+        </p:txBody>
       </p:sp>
       <p:sp>
         <p:nvSpPr>
@@ -7077,6 +7475,13 @@
             <a:prstDash val="solid"/>
           </a:ln>
         </p:spPr>
+        <p:txBody>
+          <a:bodyPr/>
+          <a:lstStyle/>
+          <a:p>
+            <a:endParaRPr lang="en-US"/>
+          </a:p>
+        </p:txBody>
       </p:sp>
       <p:sp>
         <p:nvSpPr>
@@ -7099,7 +7504,7 @@
           <a:bodyPr wrap="square" lIns="0" tIns="0" rIns="0" bIns="0" rtlCol="0" anchor="ctr"/>
           <a:lstStyle/>
           <a:p>
-            <a:pPr algn="ctr" indent="0" marL="0">
+            <a:pPr marL="0" indent="0" algn="ctr">
               <a:buNone/>
             </a:pPr>
             <a:r>
@@ -7145,6 +7550,13 @@
             <a:prstDash val="solid"/>
           </a:ln>
         </p:spPr>
+        <p:txBody>
+          <a:bodyPr/>
+          <a:lstStyle/>
+          <a:p>
+            <a:endParaRPr lang="en-US"/>
+          </a:p>
+        </p:txBody>
       </p:sp>
       <p:sp>
         <p:nvSpPr>
@@ -7167,7 +7579,7 @@
           <a:bodyPr wrap="square" lIns="0" tIns="0" rIns="0" bIns="0" rtlCol="0" anchor="ctr"/>
           <a:lstStyle/>
           <a:p>
-            <a:pPr algn="ctr" indent="0" marL="0">
+            <a:pPr marL="0" indent="0" algn="ctr">
               <a:buNone/>
             </a:pPr>
             <a:r>
@@ -7206,7 +7618,7 @@
           <a:bodyPr wrap="square" lIns="0" tIns="0" rIns="0" bIns="0" rtlCol="0" anchor="ctr"/>
           <a:lstStyle/>
           <a:p>
-            <a:pPr indent="0" marL="0">
+            <a:pPr marL="0" indent="0">
               <a:buNone/>
             </a:pPr>
             <a:r>
@@ -7245,7 +7657,7 @@
           <a:bodyPr wrap="square" lIns="0" tIns="0" rIns="0" bIns="0" rtlCol="0" anchor="t"/>
           <a:lstStyle/>
           <a:p>
-            <a:pPr indent="0" marL="0">
+            <a:pPr marL="0" indent="0">
               <a:buNone/>
             </a:pPr>
             <a:r>
@@ -7262,7 +7674,7 @@
             <a:endParaRPr lang="en-US" sz="1020" dirty="0"/>
           </a:p>
           <a:p>
-            <a:pPr indent="0" marL="0">
+            <a:pPr marL="0" indent="0">
               <a:buNone/>
             </a:pPr>
             <a:r>
@@ -7310,13 +7722,20 @@
             <a:prstDash val="solid"/>
           </a:ln>
           <a:effectLst>
-            <a:outerShdw sx="100000" sy="100000" kx="0" ky="0" algn="bl" rotWithShape="0" blurRad="3.5210699032441527e+49" dist="2.640802427433114e+49" dir="9.795520512000002e+58">
+            <a:outerShdw algn="bl" rotWithShape="0">
               <a:srgbClr val="000000">
-                <a:alpha val="3.2e+59"/>
+                <a:alpha val="0"/>
               </a:srgbClr>
             </a:outerShdw>
           </a:effectLst>
         </p:spPr>
+        <p:txBody>
+          <a:bodyPr/>
+          <a:lstStyle/>
+          <a:p>
+            <a:endParaRPr lang="en-US"/>
+          </a:p>
+        </p:txBody>
       </p:sp>
       <p:sp>
         <p:nvSpPr>
@@ -7344,6 +7763,13 @@
             <a:prstDash val="solid"/>
           </a:ln>
         </p:spPr>
+        <p:txBody>
+          <a:bodyPr/>
+          <a:lstStyle/>
+          <a:p>
+            <a:endParaRPr lang="en-US"/>
+          </a:p>
+        </p:txBody>
       </p:sp>
       <p:sp>
         <p:nvSpPr>
@@ -7373,6 +7799,13 @@
             <a:prstDash val="solid"/>
           </a:ln>
         </p:spPr>
+        <p:txBody>
+          <a:bodyPr/>
+          <a:lstStyle/>
+          <a:p>
+            <a:endParaRPr lang="en-US"/>
+          </a:p>
+        </p:txBody>
       </p:sp>
       <p:sp>
         <p:nvSpPr>
@@ -7395,7 +7828,7 @@
           <a:bodyPr wrap="square" lIns="0" tIns="0" rIns="0" bIns="0" rtlCol="0" anchor="ctr"/>
           <a:lstStyle/>
           <a:p>
-            <a:pPr algn="ctr" indent="0" marL="0">
+            <a:pPr marL="0" indent="0" algn="ctr">
               <a:buNone/>
             </a:pPr>
             <a:r>
@@ -7441,6 +7874,13 @@
             <a:prstDash val="solid"/>
           </a:ln>
         </p:spPr>
+        <p:txBody>
+          <a:bodyPr/>
+          <a:lstStyle/>
+          <a:p>
+            <a:endParaRPr lang="en-US"/>
+          </a:p>
+        </p:txBody>
       </p:sp>
       <p:sp>
         <p:nvSpPr>
@@ -7463,7 +7903,7 @@
           <a:bodyPr wrap="square" lIns="0" tIns="0" rIns="0" bIns="0" rtlCol="0" anchor="ctr"/>
           <a:lstStyle/>
           <a:p>
-            <a:pPr algn="ctr" indent="0" marL="0">
+            <a:pPr marL="0" indent="0" algn="ctr">
               <a:buNone/>
             </a:pPr>
             <a:r>
@@ -7502,7 +7942,7 @@
           <a:bodyPr wrap="square" lIns="0" tIns="0" rIns="0" bIns="0" rtlCol="0" anchor="ctr"/>
           <a:lstStyle/>
           <a:p>
-            <a:pPr indent="0" marL="0">
+            <a:pPr marL="0" indent="0">
               <a:buNone/>
             </a:pPr>
             <a:r>
@@ -7541,7 +7981,7 @@
           <a:bodyPr wrap="square" lIns="0" tIns="0" rIns="0" bIns="0" rtlCol="0" anchor="t"/>
           <a:lstStyle/>
           <a:p>
-            <a:pPr indent="0" marL="0">
+            <a:pPr marL="0" indent="0">
               <a:buNone/>
             </a:pPr>
             <a:r>
@@ -7558,7 +7998,7 @@
             <a:endParaRPr lang="en-US" sz="1020" dirty="0"/>
           </a:p>
           <a:p>
-            <a:pPr indent="0" marL="0">
+            <a:pPr marL="0" indent="0">
               <a:buNone/>
             </a:pPr>
             <a:r>
@@ -7606,13 +8046,20 @@
             <a:prstDash val="solid"/>
           </a:ln>
           <a:effectLst>
-            <a:outerShdw sx="100000" sy="100000" kx="0" ky="0" algn="bl" rotWithShape="0" blurRad="4.471758777120074e+53" dist="3.353819082840055e+53" dir="5.877312307200001e+63">
+            <a:outerShdw algn="bl" rotWithShape="0">
               <a:srgbClr val="000000">
-                <a:alpha val="3.1999999999999996e+64"/>
+                <a:alpha val="0"/>
               </a:srgbClr>
             </a:outerShdw>
           </a:effectLst>
         </p:spPr>
+        <p:txBody>
+          <a:bodyPr/>
+          <a:lstStyle/>
+          <a:p>
+            <a:endParaRPr lang="en-US"/>
+          </a:p>
+        </p:txBody>
       </p:sp>
       <p:sp>
         <p:nvSpPr>
@@ -7640,6 +8087,13 @@
             <a:prstDash val="solid"/>
           </a:ln>
         </p:spPr>
+        <p:txBody>
+          <a:bodyPr/>
+          <a:lstStyle/>
+          <a:p>
+            <a:endParaRPr lang="en-US"/>
+          </a:p>
+        </p:txBody>
       </p:sp>
       <p:sp>
         <p:nvSpPr>
@@ -7669,6 +8123,13 @@
             <a:prstDash val="solid"/>
           </a:ln>
         </p:spPr>
+        <p:txBody>
+          <a:bodyPr/>
+          <a:lstStyle/>
+          <a:p>
+            <a:endParaRPr lang="en-US"/>
+          </a:p>
+        </p:txBody>
       </p:sp>
       <p:sp>
         <p:nvSpPr>
@@ -7691,7 +8152,7 @@
           <a:bodyPr wrap="square" lIns="0" tIns="0" rIns="0" bIns="0" rtlCol="0" anchor="ctr"/>
           <a:lstStyle/>
           <a:p>
-            <a:pPr algn="ctr" indent="0" marL="0">
+            <a:pPr marL="0" indent="0" algn="ctr">
               <a:buNone/>
             </a:pPr>
             <a:r>
@@ -7737,6 +8198,13 @@
             <a:prstDash val="solid"/>
           </a:ln>
         </p:spPr>
+        <p:txBody>
+          <a:bodyPr/>
+          <a:lstStyle/>
+          <a:p>
+            <a:endParaRPr lang="en-US"/>
+          </a:p>
+        </p:txBody>
       </p:sp>
       <p:sp>
         <p:nvSpPr>
@@ -7759,7 +8227,7 @@
           <a:bodyPr wrap="square" lIns="0" tIns="0" rIns="0" bIns="0" rtlCol="0" anchor="ctr"/>
           <a:lstStyle/>
           <a:p>
-            <a:pPr algn="ctr" indent="0" marL="0">
+            <a:pPr marL="0" indent="0" algn="ctr">
               <a:buNone/>
             </a:pPr>
             <a:r>
@@ -7798,7 +8266,7 @@
           <a:bodyPr wrap="square" lIns="0" tIns="0" rIns="0" bIns="0" rtlCol="0" anchor="ctr"/>
           <a:lstStyle/>
           <a:p>
-            <a:pPr indent="0" marL="0">
+            <a:pPr marL="0" indent="0">
               <a:buNone/>
             </a:pPr>
             <a:r>
@@ -7837,7 +8305,7 @@
           <a:bodyPr wrap="square" lIns="0" tIns="0" rIns="0" bIns="0" rtlCol="0" anchor="t"/>
           <a:lstStyle/>
           <a:p>
-            <a:pPr indent="0" marL="0">
+            <a:pPr marL="0" indent="0">
               <a:buNone/>
             </a:pPr>
             <a:r>
@@ -7854,7 +8322,7 @@
             <a:endParaRPr lang="en-US" sz="1020" dirty="0"/>
           </a:p>
           <a:p>
-            <a:pPr indent="0" marL="0">
+            <a:pPr marL="0" indent="0">
               <a:buNone/>
             </a:pPr>
             <a:r>
@@ -7902,13 +8370,20 @@
             <a:prstDash val="solid"/>
           </a:ln>
           <a:effectLst>
-            <a:outerShdw sx="100000" sy="100000" kx="0" ky="0" algn="bl" rotWithShape="0" blurRad="5.679133646942494e+57" dist="4.2593502352068695e+57" dir="3.526387384320001e+68">
+            <a:outerShdw algn="bl" rotWithShape="0">
               <a:srgbClr val="000000">
-                <a:alpha val="3.1999999999999995e+69"/>
+                <a:alpha val="0"/>
               </a:srgbClr>
             </a:outerShdw>
           </a:effectLst>
         </p:spPr>
+        <p:txBody>
+          <a:bodyPr/>
+          <a:lstStyle/>
+          <a:p>
+            <a:endParaRPr lang="en-US"/>
+          </a:p>
+        </p:txBody>
       </p:sp>
       <p:sp>
         <p:nvSpPr>
@@ -7936,6 +8411,13 @@
             <a:prstDash val="solid"/>
           </a:ln>
         </p:spPr>
+        <p:txBody>
+          <a:bodyPr/>
+          <a:lstStyle/>
+          <a:p>
+            <a:endParaRPr lang="en-US"/>
+          </a:p>
+        </p:txBody>
       </p:sp>
       <p:sp>
         <p:nvSpPr>
@@ -7965,6 +8447,13 @@
             <a:prstDash val="solid"/>
           </a:ln>
         </p:spPr>
+        <p:txBody>
+          <a:bodyPr/>
+          <a:lstStyle/>
+          <a:p>
+            <a:endParaRPr lang="en-US"/>
+          </a:p>
+        </p:txBody>
       </p:sp>
       <p:sp>
         <p:nvSpPr>
@@ -7987,7 +8476,7 @@
           <a:bodyPr wrap="square" lIns="0" tIns="0" rIns="0" bIns="0" rtlCol="0" anchor="ctr"/>
           <a:lstStyle/>
           <a:p>
-            <a:pPr algn="ctr" indent="0" marL="0">
+            <a:pPr marL="0" indent="0" algn="ctr">
               <a:buNone/>
             </a:pPr>
             <a:r>
@@ -8033,6 +8522,13 @@
             <a:prstDash val="solid"/>
           </a:ln>
         </p:spPr>
+        <p:txBody>
+          <a:bodyPr/>
+          <a:lstStyle/>
+          <a:p>
+            <a:endParaRPr lang="en-US"/>
+          </a:p>
+        </p:txBody>
       </p:sp>
       <p:sp>
         <p:nvSpPr>
@@ -8055,7 +8551,7 @@
           <a:bodyPr wrap="square" lIns="0" tIns="0" rIns="0" bIns="0" rtlCol="0" anchor="ctr"/>
           <a:lstStyle/>
           <a:p>
-            <a:pPr algn="ctr" indent="0" marL="0">
+            <a:pPr marL="0" indent="0" algn="ctr">
               <a:buNone/>
             </a:pPr>
             <a:r>
@@ -8094,7 +8590,7 @@
           <a:bodyPr wrap="square" lIns="0" tIns="0" rIns="0" bIns="0" rtlCol="0" anchor="ctr"/>
           <a:lstStyle/>
           <a:p>
-            <a:pPr indent="0" marL="0">
+            <a:pPr marL="0" indent="0">
               <a:buNone/>
             </a:pPr>
             <a:r>
@@ -8133,7 +8629,7 @@
           <a:bodyPr wrap="square" lIns="0" tIns="0" rIns="0" bIns="0" rtlCol="0" anchor="t"/>
           <a:lstStyle/>
           <a:p>
-            <a:pPr indent="0" marL="0">
+            <a:pPr marL="0" indent="0">
               <a:buNone/>
             </a:pPr>
             <a:r>
@@ -8150,7 +8646,7 @@
             <a:endParaRPr lang="en-US" sz="1020" dirty="0"/>
           </a:p>
           <a:p>
-            <a:pPr indent="0" marL="0">
+            <a:pPr marL="0" indent="0">
               <a:buNone/>
             </a:pPr>
             <a:r>
@@ -8198,13 +8694,20 @@
             <a:prstDash val="solid"/>
           </a:ln>
           <a:effectLst>
-            <a:outerShdw sx="100000" sy="100000" kx="0" ky="0" algn="bl" rotWithShape="0" blurRad="7.212499731616968e+61" dist="5.409374798712724e+61" dir="2.1158324305920003e+73">
+            <a:outerShdw algn="bl" rotWithShape="0">
               <a:srgbClr val="000000">
-                <a:alpha val="3.1999999999999994e+74"/>
+                <a:alpha val="0"/>
               </a:srgbClr>
             </a:outerShdw>
           </a:effectLst>
         </p:spPr>
+        <p:txBody>
+          <a:bodyPr/>
+          <a:lstStyle/>
+          <a:p>
+            <a:endParaRPr lang="en-US"/>
+          </a:p>
+        </p:txBody>
       </p:sp>
       <p:sp>
         <p:nvSpPr>
@@ -8232,6 +8735,13 @@
             <a:prstDash val="solid"/>
           </a:ln>
         </p:spPr>
+        <p:txBody>
+          <a:bodyPr/>
+          <a:lstStyle/>
+          <a:p>
+            <a:endParaRPr lang="en-US"/>
+          </a:p>
+        </p:txBody>
       </p:sp>
       <p:sp>
         <p:nvSpPr>
@@ -8261,6 +8771,13 @@
             <a:prstDash val="solid"/>
           </a:ln>
         </p:spPr>
+        <p:txBody>
+          <a:bodyPr/>
+          <a:lstStyle/>
+          <a:p>
+            <a:endParaRPr lang="en-US"/>
+          </a:p>
+        </p:txBody>
       </p:sp>
       <p:sp>
         <p:nvSpPr>
@@ -8283,7 +8800,7 @@
           <a:bodyPr wrap="square" lIns="0" tIns="0" rIns="0" bIns="0" rtlCol="0" anchor="ctr"/>
           <a:lstStyle/>
           <a:p>
-            <a:pPr algn="ctr" indent="0" marL="0">
+            <a:pPr marL="0" indent="0" algn="ctr">
               <a:buNone/>
             </a:pPr>
             <a:r>
@@ -8329,6 +8846,13 @@
             <a:prstDash val="solid"/>
           </a:ln>
         </p:spPr>
+        <p:txBody>
+          <a:bodyPr/>
+          <a:lstStyle/>
+          <a:p>
+            <a:endParaRPr lang="en-US"/>
+          </a:p>
+        </p:txBody>
       </p:sp>
       <p:sp>
         <p:nvSpPr>
@@ -8351,7 +8875,7 @@
           <a:bodyPr wrap="square" lIns="0" tIns="0" rIns="0" bIns="0" rtlCol="0" anchor="ctr"/>
           <a:lstStyle/>
           <a:p>
-            <a:pPr algn="ctr" indent="0" marL="0">
+            <a:pPr marL="0" indent="0" algn="ctr">
               <a:buNone/>
             </a:pPr>
             <a:r>
@@ -8390,7 +8914,7 @@
           <a:bodyPr wrap="square" lIns="0" tIns="0" rIns="0" bIns="0" rtlCol="0" anchor="ctr"/>
           <a:lstStyle/>
           <a:p>
-            <a:pPr indent="0" marL="0">
+            <a:pPr marL="0" indent="0">
               <a:buNone/>
             </a:pPr>
             <a:r>
@@ -8429,7 +8953,7 @@
           <a:bodyPr wrap="square" lIns="0" tIns="0" rIns="0" bIns="0" rtlCol="0" anchor="t"/>
           <a:lstStyle/>
           <a:p>
-            <a:pPr indent="0" marL="0">
+            <a:pPr marL="0" indent="0">
               <a:buNone/>
             </a:pPr>
             <a:r>
@@ -8446,7 +8970,7 @@
             <a:endParaRPr lang="en-US" sz="1020" dirty="0"/>
           </a:p>
           <a:p>
-            <a:pPr indent="0" marL="0">
+            <a:pPr marL="0" indent="0">
               <a:buNone/>
             </a:pPr>
             <a:r>
@@ -8494,6 +9018,13 @@
             <a:prstDash val="solid"/>
           </a:ln>
         </p:spPr>
+        <p:txBody>
+          <a:bodyPr/>
+          <a:lstStyle/>
+          <a:p>
+            <a:endParaRPr lang="en-US"/>
+          </a:p>
+        </p:txBody>
       </p:sp>
       <p:sp>
         <p:nvSpPr>
@@ -8516,7 +9047,7 @@
           <a:bodyPr wrap="square" lIns="0" tIns="0" rIns="0" bIns="0" rtlCol="0" anchor="ctr"/>
           <a:lstStyle/>
           <a:p>
-            <a:pPr indent="0" marL="0">
+            <a:pPr marL="0" indent="0">
               <a:buNone/>
             </a:pPr>
             <a:r>
@@ -8555,7 +9086,7 @@
           <a:bodyPr wrap="square" lIns="0" tIns="0" rIns="0" bIns="0" rtlCol="0" anchor="ctr"/>
           <a:lstStyle/>
           <a:p>
-            <a:pPr indent="0" marL="0">
+            <a:pPr marL="0" indent="0">
               <a:buNone/>
             </a:pPr>
             <a:r>
@@ -8575,7 +9106,7 @@
       </p:sp>
       <p:sp>
         <p:nvSpPr>
-          <p:cNvPr id="25" name="Slide Number Placeholder 0"/>
+          <p:cNvPr id="62" name="Slide Number Placeholder 0"/>
           <p:cNvSpPr>
             <a:spLocks noGrp="1"/>
           </p:cNvSpPr>
@@ -8593,7 +9124,7 @@
           </a:prstGeom>
           <a:extLst>
             <a:ext uri="{C572A759-6A51-4108-AA02-DFA0A04FC94B}">
-              <ma14:wrappingTextBoxFlag xmlns:ma14="http://schemas.microsoft.com/office/mac/drawingml/2011/main" val="0"/>
+              <ma14:wrappingTextBoxFlag xmlns:ma14="http://schemas.microsoft.com/office/mac/drawingml/2011/main" xmlns="" val="0"/>
             </a:ext>
           </a:extLst>
         </p:spPr>
@@ -8614,7 +9145,7 @@
           <a:p>
             <a:pPr algn="l"/>
             <a:fld id="{F7021451-1387-4CA6-816F-3879F97B5CBC}" type="slidenum">
-              <a:rPr b="0" lang="en-US"/>
+              <a:rPr lang="en-US" b="0"/>
               <a:t>3</a:t>
             </a:fld>
             <a:endParaRPr lang="en-US"/>
@@ -8922,4 +9453,319 @@
     </a:ext>
   </a:extLst>
 </a:theme>
+</file>
+
+<file path=ppt/theme/theme2.xml><?xml version="1.0" encoding="utf-8"?>
+<a:theme xmlns:a="http://schemas.openxmlformats.org/drawingml/2006/main" name="Office Theme">
+  <a:themeElements>
+    <a:clrScheme name="Office">
+      <a:dk1>
+        <a:sysClr val="windowText" lastClr="000000"/>
+      </a:dk1>
+      <a:lt1>
+        <a:sysClr val="window" lastClr="FFFFFF"/>
+      </a:lt1>
+      <a:dk2>
+        <a:srgbClr val="0E2841"/>
+      </a:dk2>
+      <a:lt2>
+        <a:srgbClr val="E8E8E8"/>
+      </a:lt2>
+      <a:accent1>
+        <a:srgbClr val="156082"/>
+      </a:accent1>
+      <a:accent2>
+        <a:srgbClr val="E97132"/>
+      </a:accent2>
+      <a:accent3>
+        <a:srgbClr val="196B24"/>
+      </a:accent3>
+      <a:accent4>
+        <a:srgbClr val="0F9ED5"/>
+      </a:accent4>
+      <a:accent5>
+        <a:srgbClr val="A02B93"/>
+      </a:accent5>
+      <a:accent6>
+        <a:srgbClr val="4EA72E"/>
+      </a:accent6>
+      <a:hlink>
+        <a:srgbClr val="467886"/>
+      </a:hlink>
+      <a:folHlink>
+        <a:srgbClr val="96607D"/>
+      </a:folHlink>
+    </a:clrScheme>
+    <a:fontScheme name="Office">
+      <a:majorFont>
+        <a:latin typeface="Aptos Display" panose="02110004020202020204"/>
+        <a:ea typeface=""/>
+        <a:cs typeface=""/>
+        <a:font script="Jpan" typeface="游ゴシック Light"/>
+        <a:font script="Hang" typeface="맑은 고딕"/>
+        <a:font script="Hans" typeface="等线 Light"/>
+        <a:font script="Hant" typeface="新細明體"/>
+        <a:font script="Arab" typeface="Times New Roman"/>
+        <a:font script="Hebr" typeface="Times New Roman"/>
+        <a:font script="Thai" typeface="Angsana New"/>
+        <a:font script="Ethi" typeface="Nyala"/>
+        <a:font script="Beng" typeface="Vrinda"/>
+        <a:font script="Gujr" typeface="Shruti"/>
+        <a:font script="Khmr" typeface="MoolBoran"/>
+        <a:font script="Knda" typeface="Tunga"/>
+        <a:font script="Guru" typeface="Raavi"/>
+        <a:font script="Cans" typeface="Euphemia"/>
+        <a:font script="Cher" typeface="Plantagenet Cherokee"/>
+        <a:font script="Yiii" typeface="Microsoft Yi Baiti"/>
+        <a:font script="Tibt" typeface="Microsoft Himalaya"/>
+        <a:font script="Thaa" typeface="MV Boli"/>
+        <a:font script="Deva" typeface="Mangal"/>
+        <a:font script="Telu" typeface="Gautami"/>
+        <a:font script="Taml" typeface="Latha"/>
+        <a:font script="Syrc" typeface="Estrangelo Edessa"/>
+        <a:font script="Orya" typeface="Kalinga"/>
+        <a:font script="Mlym" typeface="Kartika"/>
+        <a:font script="Laoo" typeface="DokChampa"/>
+        <a:font script="Sinh" typeface="Iskoola Pota"/>
+        <a:font script="Mong" typeface="Mongolian Baiti"/>
+        <a:font script="Viet" typeface="Times New Roman"/>
+        <a:font script="Uigh" typeface="Microsoft Uighur"/>
+        <a:font script="Geor" typeface="Sylfaen"/>
+        <a:font script="Armn" typeface="Arial"/>
+        <a:font script="Bugi" typeface="Leelawadee UI"/>
+        <a:font script="Bopo" typeface="Microsoft JhengHei"/>
+        <a:font script="Java" typeface="Javanese Text"/>
+        <a:font script="Lisu" typeface="Segoe UI"/>
+        <a:font script="Mymr" typeface="Myanmar Text"/>
+        <a:font script="Nkoo" typeface="Ebrima"/>
+        <a:font script="Olck" typeface="Nirmala UI"/>
+        <a:font script="Osma" typeface="Ebrima"/>
+        <a:font script="Phag" typeface="Phagspa"/>
+        <a:font script="Syrn" typeface="Estrangelo Edessa"/>
+        <a:font script="Syrj" typeface="Estrangelo Edessa"/>
+        <a:font script="Syre" typeface="Estrangelo Edessa"/>
+        <a:font script="Sora" typeface="Nirmala UI"/>
+        <a:font script="Tale" typeface="Microsoft Tai Le"/>
+        <a:font script="Talu" typeface="Microsoft New Tai Lue"/>
+        <a:font script="Tfng" typeface="Ebrima"/>
+      </a:majorFont>
+      <a:minorFont>
+        <a:latin typeface="Aptos" panose="02110004020202020204"/>
+        <a:ea typeface=""/>
+        <a:cs typeface=""/>
+        <a:font script="Jpan" typeface="游ゴシック"/>
+        <a:font script="Hang" typeface="맑은 고딕"/>
+        <a:font script="Hans" typeface="等线"/>
+        <a:font script="Hant" typeface="新細明體"/>
+        <a:font script="Arab" typeface="Arial"/>
+        <a:font script="Hebr" typeface="Arial"/>
+        <a:font script="Thai" typeface="Cordia New"/>
+        <a:font script="Ethi" typeface="Nyala"/>
+        <a:font script="Beng" typeface="Vrinda"/>
+        <a:font script="Gujr" typeface="Shruti"/>
+        <a:font script="Khmr" typeface="DaunPenh"/>
+        <a:font script="Knda" typeface="Tunga"/>
+        <a:font script="Guru" typeface="Raavi"/>
+        <a:font script="Cans" typeface="Euphemia"/>
+        <a:font script="Cher" typeface="Plantagenet Cherokee"/>
+        <a:font script="Yiii" typeface="Microsoft Yi Baiti"/>
+        <a:font script="Tibt" typeface="Microsoft Himalaya"/>
+        <a:font script="Thaa" typeface="MV Boli"/>
+        <a:font script="Deva" typeface="Mangal"/>
+        <a:font script="Telu" typeface="Gautami"/>
+        <a:font script="Taml" typeface="Latha"/>
+        <a:font script="Syrc" typeface="Estrangelo Edessa"/>
+        <a:font script="Orya" typeface="Kalinga"/>
+        <a:font script="Mlym" typeface="Kartika"/>
+        <a:font script="Laoo" typeface="DokChampa"/>
+        <a:font script="Sinh" typeface="Iskoola Pota"/>
+        <a:font script="Mong" typeface="Mongolian Baiti"/>
+        <a:font script="Viet" typeface="Arial"/>
+        <a:font script="Uigh" typeface="Microsoft Uighur"/>
+        <a:font script="Geor" typeface="Sylfaen"/>
+        <a:font script="Armn" typeface="Arial"/>
+        <a:font script="Bugi" typeface="Leelawadee UI"/>
+        <a:font script="Bopo" typeface="Microsoft JhengHei"/>
+        <a:font script="Java" typeface="Javanese Text"/>
+        <a:font script="Lisu" typeface="Segoe UI"/>
+        <a:font script="Mymr" typeface="Myanmar Text"/>
+        <a:font script="Nkoo" typeface="Ebrima"/>
+        <a:font script="Olck" typeface="Nirmala UI"/>
+        <a:font script="Osma" typeface="Ebrima"/>
+        <a:font script="Phag" typeface="Phagspa"/>
+        <a:font script="Syrn" typeface="Estrangelo Edessa"/>
+        <a:font script="Syrj" typeface="Estrangelo Edessa"/>
+        <a:font script="Syre" typeface="Estrangelo Edessa"/>
+        <a:font script="Sora" typeface="Nirmala UI"/>
+        <a:font script="Tale" typeface="Microsoft Tai Le"/>
+        <a:font script="Talu" typeface="Microsoft New Tai Lue"/>
+        <a:font script="Tfng" typeface="Ebrima"/>
+      </a:minorFont>
+    </a:fontScheme>
+    <a:fmtScheme name="Office">
+      <a:fillStyleLst>
+        <a:solidFill>
+          <a:schemeClr val="phClr"/>
+        </a:solidFill>
+        <a:gradFill rotWithShape="1">
+          <a:gsLst>
+            <a:gs pos="0">
+              <a:schemeClr val="phClr">
+                <a:lumMod val="110000"/>
+                <a:satMod val="105000"/>
+                <a:tint val="67000"/>
+              </a:schemeClr>
+            </a:gs>
+            <a:gs pos="50000">
+              <a:schemeClr val="phClr">
+                <a:lumMod val="105000"/>
+                <a:satMod val="103000"/>
+                <a:tint val="73000"/>
+              </a:schemeClr>
+            </a:gs>
+            <a:gs pos="100000">
+              <a:schemeClr val="phClr">
+                <a:lumMod val="105000"/>
+                <a:satMod val="109000"/>
+                <a:tint val="81000"/>
+              </a:schemeClr>
+            </a:gs>
+          </a:gsLst>
+          <a:lin ang="5400000" scaled="0"/>
+        </a:gradFill>
+        <a:gradFill rotWithShape="1">
+          <a:gsLst>
+            <a:gs pos="0">
+              <a:schemeClr val="phClr">
+                <a:satMod val="103000"/>
+                <a:lumMod val="102000"/>
+                <a:tint val="94000"/>
+              </a:schemeClr>
+            </a:gs>
+            <a:gs pos="50000">
+              <a:schemeClr val="phClr">
+                <a:satMod val="110000"/>
+                <a:lumMod val="100000"/>
+                <a:shade val="100000"/>
+              </a:schemeClr>
+            </a:gs>
+            <a:gs pos="100000">
+              <a:schemeClr val="phClr">
+                <a:lumMod val="99000"/>
+                <a:satMod val="120000"/>
+                <a:shade val="78000"/>
+              </a:schemeClr>
+            </a:gs>
+          </a:gsLst>
+          <a:lin ang="5400000" scaled="0"/>
+        </a:gradFill>
+      </a:fillStyleLst>
+      <a:lnStyleLst>
+        <a:ln w="12700" cap="flat" cmpd="sng" algn="ctr">
+          <a:solidFill>
+            <a:schemeClr val="phClr"/>
+          </a:solidFill>
+          <a:prstDash val="solid"/>
+          <a:miter lim="800000"/>
+        </a:ln>
+        <a:ln w="19050" cap="flat" cmpd="sng" algn="ctr">
+          <a:solidFill>
+            <a:schemeClr val="phClr"/>
+          </a:solidFill>
+          <a:prstDash val="solid"/>
+          <a:miter lim="800000"/>
+        </a:ln>
+        <a:ln w="25400" cap="flat" cmpd="sng" algn="ctr">
+          <a:solidFill>
+            <a:schemeClr val="phClr"/>
+          </a:solidFill>
+          <a:prstDash val="solid"/>
+          <a:miter lim="800000"/>
+        </a:ln>
+      </a:lnStyleLst>
+      <a:effectStyleLst>
+        <a:effectStyle>
+          <a:effectLst/>
+        </a:effectStyle>
+        <a:effectStyle>
+          <a:effectLst/>
+        </a:effectStyle>
+        <a:effectStyle>
+          <a:effectLst>
+            <a:outerShdw blurRad="57150" dist="19050" dir="5400000" algn="ctr" rotWithShape="0">
+              <a:srgbClr val="000000">
+                <a:alpha val="63000"/>
+              </a:srgbClr>
+            </a:outerShdw>
+          </a:effectLst>
+        </a:effectStyle>
+      </a:effectStyleLst>
+      <a:bgFillStyleLst>
+        <a:solidFill>
+          <a:schemeClr val="phClr"/>
+        </a:solidFill>
+        <a:solidFill>
+          <a:schemeClr val="phClr">
+            <a:tint val="95000"/>
+            <a:satMod val="170000"/>
+          </a:schemeClr>
+        </a:solidFill>
+        <a:gradFill rotWithShape="1">
+          <a:gsLst>
+            <a:gs pos="0">
+              <a:schemeClr val="phClr">
+                <a:tint val="93000"/>
+                <a:satMod val="150000"/>
+                <a:shade val="98000"/>
+                <a:lumMod val="102000"/>
+              </a:schemeClr>
+            </a:gs>
+            <a:gs pos="50000">
+              <a:schemeClr val="phClr">
+                <a:tint val="98000"/>
+                <a:satMod val="130000"/>
+                <a:shade val="90000"/>
+                <a:lumMod val="103000"/>
+              </a:schemeClr>
+            </a:gs>
+            <a:gs pos="100000">
+              <a:schemeClr val="phClr">
+                <a:shade val="63000"/>
+                <a:satMod val="120000"/>
+              </a:schemeClr>
+            </a:gs>
+          </a:gsLst>
+          <a:lin ang="5400000" scaled="0"/>
+        </a:gradFill>
+      </a:bgFillStyleLst>
+    </a:fmtScheme>
+  </a:themeElements>
+  <a:objectDefaults>
+    <a:lnDef>
+      <a:spPr/>
+      <a:bodyPr/>
+      <a:lstStyle/>
+      <a:style>
+        <a:lnRef idx="2">
+          <a:schemeClr val="accent1"/>
+        </a:lnRef>
+        <a:fillRef idx="0">
+          <a:schemeClr val="accent1"/>
+        </a:fillRef>
+        <a:effectRef idx="1">
+          <a:schemeClr val="accent1"/>
+        </a:effectRef>
+        <a:fontRef idx="minor">
+          <a:schemeClr val="tx1"/>
+        </a:fontRef>
+      </a:style>
+    </a:lnDef>
+  </a:objectDefaults>
+  <a:extraClrSchemeLst/>
+  <a:extLst>
+    <a:ext uri="{05A4C25C-085E-4340-85A3-A5531E510DB2}">
+      <thm15:themeFamily xmlns:thm15="http://schemas.microsoft.com/office/thememl/2012/main" name="Office Theme" id="{2E142A2C-CD16-42D6-873A-C26D2A0506FA}" vid="{1BDDFF52-6CD6-40A5-AB3C-68EB2F1E4D0A}"/>
+    </a:ext>
+  </a:extLst>
+</a:theme>
 </file>